--- a/final-product/presentation/Multi_Robot_Frontier_Exploration.pptx
+++ b/final-product/presentation/Multi_Robot_Frontier_Exploration.pptx
@@ -22,9 +22,10 @@
     <p:sldId id="270" r:id="rId16"/>
     <p:sldId id="271" r:id="rId17"/>
     <p:sldId id="272" r:id="rId18"/>
+    <p:sldId id="273" r:id="rId19"/>
   </p:sldIdLst>
   <p:notesMasterIdLst>
-    <p:notesMasterId r:id="rId19"/>
+    <p:notesMasterId r:id="rId20"/>
   </p:notesMasterIdLst>
   <p:sldSz cx="12192000" cy="6858000"/>
   <p:notesSz cx="6858000" cy="12192000"/>
@@ -123,49 +124,50 @@
   <p:extLst>
     <p:ext uri="{521415D9-36F7-43E2-AB2F-B90AF26B5E84}">
       <p14:sectionLst xmlns:p14="http://schemas.microsoft.com/office/powerpoint/2010/main">
-        <p14:section name="Introduction" id="{7875d5e5-ab3d-f729-95fd-5729c42b3dd7}">
+        <p14:section name="Introduction" id="{4037a901-15d9-cea8-3173-9bb01a91392a}">
           <p14:sldIdLst>
             <p14:sldId id="256"/>
             <p14:sldId id="257"/>
           </p14:sldIdLst>
         </p14:section>
-        <p14:section name="System" id="{5b5def01-2772-eec3-0373-365cfd473b09}">
+        <p14:section name="System" id="{4d16e6ff-be6b-df2a-4582-bde235e6a316}">
           <p14:sldIdLst>
             <p14:sldId id="258"/>
             <p14:sldId id="259"/>
             <p14:sldId id="260"/>
+            <p14:sldId id="261"/>
           </p14:sldIdLst>
         </p14:section>
-        <p14:section name="Exploration brains" id="{9f76b751-6589-a999-ae98-05879c3ff4f0}">
+        <p14:section name="Exploration brains" id="{dabbf53d-273b-ac1c-7c10-a08e36b0a8c0}">
           <p14:sldIdLst>
-            <p14:sldId id="261"/>
             <p14:sldId id="262"/>
+            <p14:sldId id="263"/>
           </p14:sldIdLst>
         </p14:section>
-        <p14:section name="Reinforcement learning" id="{74b064fa-8933-1951-51ff-1142d1c7b815}">
+        <p14:section name="Reinforcement learning" id="{673579e1-f7e2-70a5-e56d-e3982fc941ee}">
           <p14:sldIdLst>
-            <p14:sldId id="263"/>
             <p14:sldId id="264"/>
             <p14:sldId id="265"/>
             <p14:sldId id="266"/>
+            <p14:sldId id="267"/>
           </p14:sldIdLst>
         </p14:section>
-        <p14:section name="Results" id="{6fe2f92b-a6bf-340b-dc02-eed3acdb38fa}">
+        <p14:section name="Results" id="{2edb2173-db05-b519-2a43-410a3598c72d}">
           <p14:sldIdLst>
-            <p14:sldId id="267"/>
             <p14:sldId id="268"/>
             <p14:sldId id="269"/>
             <p14:sldId id="270"/>
-          </p14:sldIdLst>
-        </p14:section>
-        <p14:section name="Product" id="{afc18440-70a9-e5b4-1535-b3b4e9320899}">
-          <p14:sldIdLst>
             <p14:sldId id="271"/>
           </p14:sldIdLst>
         </p14:section>
-        <p14:section name="Next steps" id="{f9e8f44a-1ae4-8b8d-f814-f3fe5f1795d2}">
+        <p14:section name="Product" id="{64b4c023-f4a1-4eb3-ce64-ebd961f66964}">
           <p14:sldIdLst>
             <p14:sldId id="272"/>
+          </p14:sldIdLst>
+        </p14:section>
+        <p14:section name="Next steps" id="{63f4a048-9861-da5c-044e-f9b76df7cb68}">
+          <p14:sldIdLst>
+            <p14:sldId id="273"/>
           </p14:sldIdLst>
         </p14:section>
       </p14:sectionLst>
@@ -178,6 +180,364 @@
 </file>
 
 <file path=ppt/charts/chart1.xml><?xml version="1.0" encoding="utf-8"?>
+<c:chartSpace xmlns:c="http://schemas.openxmlformats.org/drawingml/2006/chart" xmlns:a="http://schemas.openxmlformats.org/drawingml/2006/main" xmlns:r="http://schemas.openxmlformats.org/officeDocument/2006/relationships">
+  <c:date1904 val="0"/>
+  <c:roundedCorners val="1"/>
+  <c:chart>
+    <c:title>
+      <c:tx>
+        <c:rich>
+          <a:bodyPr/>
+          <a:lstStyle/>
+          <a:p>
+            <a:pPr>
+              <a:defRPr sz="1400" b="0" i="0" u="none" strike="noStrike">
+                <a:solidFill>
+                  <a:srgbClr val="1B2430"/>
+                </a:solidFill>
+                <a:latin typeface="+mn-lt"/>
+              </a:defRPr>
+            </a:pPr>
+            <a:r>
+              <a:rPr sz="1400" b="0" i="0" u="none" strike="noStrike">
+                <a:solidFill>
+                  <a:srgbClr val="1B2430"/>
+                </a:solidFill>
+                <a:latin typeface="+mn-lt"/>
+              </a:rPr>
+              <a:t>'Start pose is an obstacle' errors per 240 s run</a:t>
+            </a:r>
+          </a:p>
+        </c:rich>
+      </c:tx>
+      <c:layout/>
+      <c:overlay val="0"/>
+    </c:title>
+    <c:autoTitleDeleted val="0"/>
+    <c:plotArea>
+      <c:layout/>
+      <c:barChart>
+        <c:barDir val="col"/>
+        <c:grouping val="clustered"/>
+        <c:varyColors val="0"/>
+        <c:ser>
+          <c:idx val="0"/>
+          <c:order val="0"/>
+          <c:tx>
+            <c:strRef>
+              <c:f>Sheet1!$B$1</c:f>
+              <c:strCache>
+                <c:ptCount val="1"/>
+                <c:pt idx="0">
+                  <c:v>Before fix</c:v>
+                </c:pt>
+              </c:strCache>
+            </c:strRef>
+          </c:tx>
+          <c:spPr>
+            <a:solidFill>
+              <a:srgbClr val="9AA6B2"/>
+            </a:solidFill>
+            <a:effectLst/>
+          </c:spPr>
+          <c:invertIfNegative val="0"/>
+          <c:dLbls>
+            <c:numFmt formatCode="0.0" sourceLinked="0"/>
+            <c:txPr>
+              <a:bodyPr/>
+              <a:lstStyle/>
+              <a:p>
+                <a:pPr>
+                  <a:defRPr b="0" i="0" strike="noStrike" sz="1100" u="none">
+                    <a:solidFill>
+                      <a:srgbClr val="1B2430"/>
+                    </a:solidFill>
+                    <a:latin typeface="+mn-lt"/>
+                  </a:defRPr>
+                </a:pPr>
+              </a:p>
+            </c:txPr>
+            <c:showLegendKey val="0"/>
+            <c:showVal val="1"/>
+            <c:showCatName val="0"/>
+            <c:showSerName val="0"/>
+            <c:showPercent val="0"/>
+            <c:showBubbleSize val="0"/>
+            <c:showLeaderLines val="0"/>
+          </c:dLbls>
+          <c:cat>
+            <c:multiLvlStrRef>
+              <c:f>Sheet1!$A$2:$A$3</c:f>
+              <c:multiLvlStrCache>
+                <c:ptCount val="2"/>
+                <c:lvl>
+                  <c:pt idx="0">
+                    <c:v>PPO</c:v>
+                  </c:pt>
+                  <c:pt idx="1">
+                    <c:v>Heuristic</c:v>
+                  </c:pt>
+                </c:lvl>
+              </c:multiLvlStrCache>
+            </c:multiLvlStrRef>
+          </c:cat>
+          <c:val>
+            <c:numRef>
+              <c:f>Sheet1!$B$2:$B$3</c:f>
+              <c:numCache>
+                <c:formatCode>General</c:formatCode>
+                <c:ptCount val="2"/>
+                <c:pt idx="0">
+                  <c:v>29.5</c:v>
+                </c:pt>
+                <c:pt idx="1">
+                  <c:v>54.8</c:v>
+                </c:pt>
+              </c:numCache>
+            </c:numRef>
+          </c:val>
+        </c:ser>
+        <c:ser>
+          <c:idx val="1"/>
+          <c:order val="1"/>
+          <c:tx>
+            <c:strRef>
+              <c:f>Sheet1!$C$1</c:f>
+              <c:strCache>
+                <c:ptCount val="1"/>
+                <c:pt idx="0">
+                  <c:v>After fix</c:v>
+                </c:pt>
+              </c:strCache>
+            </c:strRef>
+          </c:tx>
+          <c:spPr>
+            <a:solidFill>
+              <a:srgbClr val="0E7C86"/>
+            </a:solidFill>
+            <a:effectLst/>
+          </c:spPr>
+          <c:invertIfNegative val="0"/>
+          <c:dLbls>
+            <c:numFmt formatCode="0.0" sourceLinked="0"/>
+            <c:txPr>
+              <a:bodyPr/>
+              <a:lstStyle/>
+              <a:p>
+                <a:pPr>
+                  <a:defRPr b="0" i="0" strike="noStrike" sz="1100" u="none">
+                    <a:solidFill>
+                      <a:srgbClr val="1B2430"/>
+                    </a:solidFill>
+                    <a:latin typeface="+mn-lt"/>
+                  </a:defRPr>
+                </a:pPr>
+              </a:p>
+            </c:txPr>
+            <c:showLegendKey val="0"/>
+            <c:showVal val="1"/>
+            <c:showCatName val="0"/>
+            <c:showSerName val="0"/>
+            <c:showPercent val="0"/>
+            <c:showBubbleSize val="0"/>
+            <c:showLeaderLines val="0"/>
+          </c:dLbls>
+          <c:cat>
+            <c:multiLvlStrRef>
+              <c:f>Sheet1!$A$2:$A$3</c:f>
+              <c:multiLvlStrCache>
+                <c:ptCount val="2"/>
+                <c:lvl>
+                  <c:pt idx="0">
+                    <c:v>PPO</c:v>
+                  </c:pt>
+                  <c:pt idx="1">
+                    <c:v>Heuristic</c:v>
+                  </c:pt>
+                </c:lvl>
+              </c:multiLvlStrCache>
+            </c:multiLvlStrRef>
+          </c:cat>
+          <c:val>
+            <c:numRef>
+              <c:f>Sheet1!$C$2:$C$3</c:f>
+              <c:numCache>
+                <c:formatCode>General</c:formatCode>
+                <c:ptCount val="2"/>
+                <c:pt idx="0">
+                  <c:v>1.5</c:v>
+                </c:pt>
+                <c:pt idx="1">
+                  <c:v>0.4</c:v>
+                </c:pt>
+              </c:numCache>
+            </c:numRef>
+          </c:val>
+        </c:ser>
+        <c:dLbls>
+          <c:numFmt formatCode="0.0" sourceLinked="0"/>
+          <c:txPr>
+            <a:bodyPr/>
+            <a:lstStyle/>
+            <a:p>
+              <a:pPr>
+                <a:defRPr b="0" i="0" strike="noStrike" sz="1100" u="none">
+                  <a:solidFill>
+                    <a:srgbClr val="1B2430"/>
+                  </a:solidFill>
+                  <a:latin typeface="+mn-lt"/>
+                </a:defRPr>
+              </a:pPr>
+            </a:p>
+          </c:txPr>
+          <c:showLegendKey val="0"/>
+          <c:showVal val="1"/>
+          <c:showCatName val="0"/>
+          <c:showSerName val="0"/>
+          <c:showPercent val="0"/>
+          <c:showBubbleSize val="0"/>
+          <c:showLeaderLines val="0"/>
+        </c:dLbls>
+        <c:gapWidth val="150"/>
+        <c:overlap val="0"/>
+        <c:axId val="2094734554"/>
+        <c:axId val="2094734552"/>
+        <c:axId val="2094734556"/>
+      </c:barChart>
+      <c:catAx>
+        <c:axId val="2094734554"/>
+        <c:scaling>
+          <c:orientation val="minMax"/>
+        </c:scaling>
+        <c:delete val="0"/>
+        <c:axPos val="b"/>
+        <c:numFmt formatCode="General" sourceLinked="1"/>
+        <c:majorTickMark val="out"/>
+        <c:minorTickMark val="none"/>
+        <c:tickLblPos val="low"/>
+        <c:spPr>
+          <a:ln w="12700" cap="flat">
+            <a:solidFill>
+              <a:srgbClr val="888888"/>
+            </a:solidFill>
+            <a:prstDash val="solid"/>
+            <a:round/>
+          </a:ln>
+        </c:spPr>
+        <c:txPr>
+          <a:bodyPr/>
+          <a:lstStyle/>
+          <a:p>
+            <a:pPr>
+              <a:defRPr sz="1200" b="0" i="0" u="none" strike="noStrike">
+                <a:solidFill>
+                  <a:srgbClr val="5B6B7A"/>
+                </a:solidFill>
+                <a:latin typeface="+mn-lt"/>
+              </a:defRPr>
+            </a:pPr>
+            <a:endParaRPr lang="en-US"/>
+          </a:p>
+        </c:txPr>
+        <c:crossAx val="2094734552"/>
+        <c:crosses val="autoZero"/>
+        <c:auto val="1"/>
+        <c:lblAlgn val="ctr"/>
+        <c:noMultiLvlLbl val="1"/>
+      </c:catAx>
+      <c:valAx>
+        <c:axId val="2094734552"/>
+        <c:scaling>
+          <c:orientation val="minMax"/>
+          <c:min val="0"/>
+        </c:scaling>
+        <c:delete val="0"/>
+        <c:axPos val="l"/>
+        <c:majorGridlines>
+          <c:spPr>
+            <a:ln w="9525" cap="flat">
+              <a:solidFill>
+                <a:srgbClr val="D9E1E8"/>
+              </a:solidFill>
+              <a:prstDash val="solid"/>
+              <a:round/>
+            </a:ln>
+          </c:spPr>
+        </c:majorGridlines>
+        <c:numFmt formatCode="General" sourceLinked="0"/>
+        <c:majorTickMark val="out"/>
+        <c:minorTickMark val="none"/>
+        <c:tickLblPos val="nextTo"/>
+        <c:spPr>
+          <a:ln w="12700" cap="flat">
+            <a:solidFill>
+              <a:srgbClr val="888888"/>
+            </a:solidFill>
+            <a:prstDash val="solid"/>
+            <a:round/>
+          </a:ln>
+        </c:spPr>
+        <c:txPr>
+          <a:bodyPr/>
+          <a:lstStyle/>
+          <a:p>
+            <a:pPr>
+              <a:defRPr sz="1100" b="0" i="0" u="none" strike="noStrike">
+                <a:solidFill>
+                  <a:srgbClr val="5B6B7A"/>
+                </a:solidFill>
+                <a:latin typeface="+mn-lt"/>
+              </a:defRPr>
+            </a:pPr>
+            <a:endParaRPr lang="en-US"/>
+          </a:p>
+        </c:txPr>
+        <c:crossAx val="2094734554"/>
+        <c:crosses val="autoZero"/>
+        <c:crossBetween val="between"/>
+      </c:valAx>
+      <c:spPr>
+        <a:noFill/>
+        <a:ln>
+          <a:noFill/>
+        </a:ln>
+        <a:effectLst/>
+      </c:spPr>
+    </c:plotArea>
+    <c:legend>
+      <c:legendPos val="b"/>
+      <c:overlay val="0"/>
+      <c:txPr>
+        <a:bodyPr/>
+        <a:lstStyle/>
+        <a:p>
+          <a:pPr>
+            <a:defRPr sz="1200">
+              <a:latin typeface="+mn-lt"/>
+              <a:cs typeface="+mn-lt"/>
+            </a:defRPr>
+          </a:pPr>
+          <a:endParaRPr lang="en-US"/>
+        </a:p>
+      </c:txPr>
+    </c:legend>
+    <c:plotVisOnly val="1"/>
+    <c:dispBlanksAs val="span"/>
+  </c:chart>
+  <c:spPr>
+    <a:noFill/>
+    <a:ln>
+      <a:noFill/>
+    </a:ln>
+    <a:effectLst/>
+  </c:spPr>
+  <c:externalData r:id="rId1">
+    <c:autoUpdate val="0"/>
+  </c:externalData>
+</c:chartSpace>
+</file>
+
+<file path=ppt/charts/chart2.xml><?xml version="1.0" encoding="utf-8"?>
 <c:chartSpace xmlns:c="http://schemas.openxmlformats.org/drawingml/2006/chart" xmlns:a="http://schemas.openxmlformats.org/drawingml/2006/main" xmlns:r="http://schemas.openxmlformats.org/officeDocument/2006/relationships">
   <c:date1904 val="0"/>
   <c:roundedCorners val="1"/>
@@ -336,16 +696,16 @@
                 <c:formatCode>General</c:formatCode>
                 <c:ptCount val="4"/>
                 <c:pt idx="0">
-                  <c:v>65.5</c:v>
+                  <c:v>67</c:v>
                 </c:pt>
                 <c:pt idx="1">
-                  <c:v>72.5</c:v>
+                  <c:v>111</c:v>
                 </c:pt>
                 <c:pt idx="2">
-                  <c:v>105.5</c:v>
+                  <c:v>112</c:v>
                 </c:pt>
                 <c:pt idx="3">
-                  <c:v>143</c:v>
+                  <c:v>163</c:v>
                 </c:pt>
               </c:numCache>
             </c:numRef>
@@ -497,7 +857,7 @@
 </c:chartSpace>
 </file>
 
-<file path=ppt/charts/chart2.xml><?xml version="1.0" encoding="utf-8"?>
+<file path=ppt/charts/chart3.xml><?xml version="1.0" encoding="utf-8"?>
 <c:chartSpace xmlns:c="http://schemas.openxmlformats.org/drawingml/2006/chart" xmlns:a="http://schemas.openxmlformats.org/drawingml/2006/main" xmlns:r="http://schemas.openxmlformats.org/officeDocument/2006/relationships">
   <c:date1904 val="0"/>
   <c:roundedCorners val="1"/>
@@ -612,16 +972,16 @@
                 <c:formatCode>General</c:formatCode>
                 <c:ptCount val="4"/>
                 <c:pt idx="0">
-                  <c:v>21.4</c:v>
+                  <c:v>18.8</c:v>
                 </c:pt>
                 <c:pt idx="1">
-                  <c:v>30.6</c:v>
+                  <c:v>28.5</c:v>
                 </c:pt>
                 <c:pt idx="2">
-                  <c:v>37.8</c:v>
+                  <c:v>36.7</c:v>
                 </c:pt>
                 <c:pt idx="3">
-                  <c:v>41.8</c:v>
+                  <c:v>41.3</c:v>
                 </c:pt>
               </c:numCache>
             </c:numRef>
@@ -701,16 +1061,16 @@
                 <c:formatCode>General</c:formatCode>
                 <c:ptCount val="4"/>
                 <c:pt idx="0">
-                  <c:v>19.5</c:v>
+                  <c:v>17.3</c:v>
                 </c:pt>
                 <c:pt idx="1">
-                  <c:v>26.5</c:v>
+                  <c:v>24.7</c:v>
                 </c:pt>
                 <c:pt idx="2">
-                  <c:v>31.4</c:v>
+                  <c:v>32.4</c:v>
                 </c:pt>
                 <c:pt idx="3">
-                  <c:v>36.2</c:v>
+                  <c:v>38.4</c:v>
                 </c:pt>
               </c:numCache>
             </c:numRef>
@@ -879,7 +1239,7 @@
 </c:chartSpace>
 </file>
 
-<file path=ppt/charts/chart3.xml><?xml version="1.0" encoding="utf-8"?>
+<file path=ppt/charts/chart4.xml><?xml version="1.0" encoding="utf-8"?>
 <c:chartSpace xmlns:c="http://schemas.openxmlformats.org/drawingml/2006/chart" xmlns:a="http://schemas.openxmlformats.org/drawingml/2006/main" xmlns:r="http://schemas.openxmlformats.org/officeDocument/2006/relationships">
   <c:date1904 val="0"/>
   <c:roundedCorners val="1"/>
@@ -905,7 +1265,7 @@
                 </a:solidFill>
                 <a:latin typeface="+mn-lt"/>
               </a:rPr>
-              <a:t>Paired difference at 240 s (m²), by run pair</a:t>
+              <a:t>Time to 30 m²: PPO − heuristic (s), by run pair</a:t>
             </a:r>
           </a:p>
         </c:rich>
@@ -929,7 +1289,7 @@
               <c:strCache>
                 <c:ptCount val="1"/>
                 <c:pt idx="0">
-                  <c:v>PPO − heuristic at 240 s</c:v>
+                  <c:v>PPO − heuristic, time to 30 m²</c:v>
                 </c:pt>
               </c:strCache>
             </c:strRef>
@@ -942,7 +1302,7 @@
           </c:spPr>
           <c:invertIfNegative val="0"/>
           <c:dLbls>
-            <c:numFmt formatCode="0.0" sourceLinked="0"/>
+            <c:numFmt formatCode="0" sourceLinked="0"/>
             <c:txPr>
               <a:bodyPr/>
               <a:lstStyle/>
@@ -1006,35 +1366,35 @@
                 <c:formatCode>General</c:formatCode>
                 <c:ptCount val="8"/>
                 <c:pt idx="0">
-                  <c:v>6.7</c:v>
+                  <c:v>-37</c:v>
                 </c:pt>
                 <c:pt idx="1">
-                  <c:v>11.6</c:v>
+                  <c:v>-116</c:v>
                 </c:pt>
                 <c:pt idx="2">
-                  <c:v>0.4</c:v>
+                  <c:v>-4</c:v>
                 </c:pt>
                 <c:pt idx="3">
-                  <c:v>6.8</c:v>
+                  <c:v>-24</c:v>
                 </c:pt>
                 <c:pt idx="4">
-                  <c:v>3.9</c:v>
+                  <c:v>-7</c:v>
                 </c:pt>
                 <c:pt idx="5">
-                  <c:v>0.8</c:v>
+                  <c:v>-19</c:v>
                 </c:pt>
                 <c:pt idx="6">
-                  <c:v>4.8</c:v>
+                  <c:v>-43</c:v>
                 </c:pt>
                 <c:pt idx="7">
-                  <c:v>9.3</c:v>
+                  <c:v>-13</c:v>
                 </c:pt>
               </c:numCache>
             </c:numRef>
           </c:val>
         </c:ser>
         <c:dLbls>
-          <c:numFmt formatCode="0.0" sourceLinked="0"/>
+          <c:numFmt formatCode="0" sourceLinked="0"/>
           <c:txPr>
             <a:bodyPr/>
             <a:lstStyle/>
@@ -1108,7 +1468,6 @@
         <c:axId val="2094734552"/>
         <c:scaling>
           <c:orientation val="minMax"/>
-          <c:min val="0"/>
         </c:scaling>
         <c:delete val="0"/>
         <c:axPos val="l"/>
@@ -2302,6 +2661,94 @@
             <a:fld id="{F7021451-1387-4CA6-816F-3879F97B5CBC}" type="slidenum">
               <a:rPr lang="en-US"/>
               <a:t>17</a:t>
+            </a:fld>
+            <a:endParaRPr lang="en-US"/>
+          </a:p>
+        </p:txBody>
+      </p:sp>
+    </p:spTree>
+    <p:extLst>
+      <p:ext uri="{BB962C8B-B14F-4D97-AF65-F5344CB8AC3E}">
+        <p14:creationId xmlns:p14="http://schemas.microsoft.com/office/powerpoint/2010/main" val="1024086991"/>
+      </p:ext>
+    </p:extLst>
+  </p:cSld>
+  <p:clrMapOvr>
+    <a:masterClrMapping/>
+  </p:clrMapOvr>
+</p:notes>
+</file>
+
+<file path=ppt/notesSlides/notesSlide18.xml><?xml version="1.0" encoding="utf-8"?>
+<p:notes xmlns:a="http://schemas.openxmlformats.org/drawingml/2006/main" xmlns:r="http://schemas.openxmlformats.org/officeDocument/2006/relationships" xmlns:p="http://schemas.openxmlformats.org/presentationml/2006/main">
+  <p:cSld>
+    <p:spTree>
+      <p:nvGrpSpPr>
+        <p:cNvPr id="1" name=""/>
+        <p:cNvGrpSpPr/>
+        <p:nvPr/>
+      </p:nvGrpSpPr>
+      <p:grpSpPr>
+        <a:xfrm>
+          <a:off x="0" y="0"/>
+          <a:ext cx="0" cy="0"/>
+          <a:chOff x="0" y="0"/>
+          <a:chExt cx="0" cy="0"/>
+        </a:xfrm>
+      </p:grpSpPr>
+      <p:sp>
+        <p:nvSpPr>
+          <p:cNvPr id="2" name="Slide Image Placeholder 1"/>
+          <p:cNvSpPr>
+            <a:spLocks noGrp="1" noRot="1" noChangeAspect="1"/>
+          </p:cNvSpPr>
+          <p:nvPr>
+            <p:ph type="sldImg"/>
+          </p:nvPr>
+        </p:nvSpPr>
+        <p:spPr/>
+      </p:sp>
+      <p:sp>
+        <p:nvSpPr>
+          <p:cNvPr id="3" name="Notes Placeholder 2"/>
+          <p:cNvSpPr>
+            <a:spLocks noGrp="1"/>
+          </p:cNvSpPr>
+          <p:nvPr>
+            <p:ph type="body" idx="1"/>
+          </p:nvPr>
+        </p:nvSpPr>
+        <p:spPr/>
+        <p:txBody>
+          <a:bodyPr/>
+          <a:lstStyle/>
+          <a:p>
+            <a:r>
+              <a:rPr lang="en-US" dirty="0"/>
+              <a:t/>
+            </a:r>
+            <a:endParaRPr lang="en-US" dirty="0"/>
+          </a:p>
+        </p:txBody>
+      </p:sp>
+      <p:sp>
+        <p:nvSpPr>
+          <p:cNvPr id="4" name="Slide Number Placeholder 3"/>
+          <p:cNvSpPr>
+            <a:spLocks noGrp="1"/>
+          </p:cNvSpPr>
+          <p:nvPr>
+            <p:ph type="sldNum" sz="quarter" idx="10"/>
+          </p:nvPr>
+        </p:nvSpPr>
+        <p:spPr/>
+        <p:txBody>
+          <a:bodyPr/>
+          <a:lstStyle/>
+          <a:p>
+            <a:fld id="{F7021451-1387-4CA6-816F-3879F97B5CBC}" type="slidenum">
+              <a:rPr lang="en-US"/>
+              <a:t>18</a:t>
             </a:fld>
             <a:endParaRPr lang="en-US"/>
           </a:p>
@@ -3766,7 +4213,7 @@
                 <a:ea typeface="Cambria" pitchFamily="34" charset="-122"/>
                 <a:cs typeface="Cambria" pitchFamily="34" charset="-120"/>
               </a:rPr>
-              <a:t>Training converges within ~30k decisions</a:t>
+              <a:t>The 2D training simulator (rl_sim)</a:t>
             </a:r>
             <a:endParaRPr lang="en-US" sz="3200" dirty="0"/>
           </a:p>
@@ -3774,7 +4221,7 @@
       </p:sp>
       <p:pic>
         <p:nvPicPr>
-          <p:cNvPr id="3" name="Image 0" descr="20 training dashboard">    </p:cNvPr>
+          <p:cNvPr id="3" name="Image 0" descr="06 env step">    </p:cNvPr>
           <p:cNvPicPr>
             <a:picLocks noChangeAspect="1"/>
           </p:cNvPicPr>
@@ -3788,8 +4235,8 @@
         </p:blipFill>
         <p:spPr>
           <a:xfrm>
-            <a:off x="459570" y="1143000"/>
-            <a:ext cx="7859100" cy="5486400"/>
+            <a:off x="548640" y="1201516"/>
+            <a:ext cx="7315200" cy="3723449"/>
           </a:xfrm>
           <a:prstGeom prst="rect">
             <a:avLst/>
@@ -3804,8 +4251,8 @@
         </p:nvSpPr>
         <p:spPr>
           <a:xfrm>
-            <a:off x="8503920" y="1371600"/>
-            <a:ext cx="3291840" cy="5029200"/>
+            <a:off x="8138160" y="1371600"/>
+            <a:ext cx="3657600" cy="4846320"/>
           </a:xfrm>
           <a:prstGeom prst="rect">
             <a:avLst/>
@@ -3830,7 +4277,7 @@
                   <a:schemeClr val="tx1"/>
                 </a:solidFill>
               </a:rPr>
-              <a:t>Reward passes the heuristic level (dashed) and stays flat</a:t>
+              <a:t>Arena parsed from the same world file Gazebo loads, at 0.05 m resolution</a:t>
             </a:r>
             <a:endParaRPr lang="en-US" sz="1500" dirty="0"/>
           </a:p>
@@ -3848,7 +4295,7 @@
                   <a:schemeClr val="tx1"/>
                 </a:solidFill>
               </a:rPr>
-              <a:t>Entropy → 0: the policy becomes confident</a:t>
+              <a:t>360-ray lidar, 3.5 m range (TurtleBot3 LDS-01)</a:t>
             </a:r>
             <a:endParaRPr lang="en-US" sz="1500" dirty="0"/>
           </a:p>
@@ -3866,7 +4313,7 @@
                   <a:schemeClr val="tx1"/>
                 </a:solidFill>
               </a:rPr>
-              <a:t>Explained variance → 1: the critic predicts returns</a:t>
+              <a:t>A* on a 0.3 m-inflated map at 0.15 m/s (stand-in for Nav2)</a:t>
             </a:r>
             <a:endParaRPr lang="en-US" sz="1500" dirty="0"/>
           </a:p>
@@ -3884,27 +4331,45 @@
                   <a:schemeClr val="tx1"/>
                 </a:solidFill>
               </a:rPr>
-              <a:t>KL and clip fraction fall to ≈ 0: updates stop changing the policy</a:t>
+              <a:t>Frontier detection identical to the coordinator</a:t>
             </a:r>
             <a:endParaRPr lang="en-US" sz="1500" dirty="0"/>
           </a:p>
-          <a:p>
-            <a:pPr marL="342900" indent="-342900">
-              <a:spcAft>
-                <a:spcPts val="800"/>
-              </a:spcAft>
-              <a:buSzPct val="100000"/>
-              <a:buChar char="•"/>
-            </a:pPr>
-            <a:r>
-              <a:rPr lang="en-US" sz="1500" dirty="0">
-                <a:solidFill>
-                  <a:schemeClr val="tx1"/>
-                </a:solidFill>
-              </a:rPr>
-              <a:t>300k decisions in ~25 min on a laptop CPU</a:t>
-            </a:r>
-            <a:endParaRPr lang="en-US" sz="1500" dirty="0"/>
+        </p:txBody>
+      </p:sp>
+      <p:sp>
+        <p:nvSpPr>
+          <p:cNvPr id="5" name="Text 2"/>
+          <p:cNvSpPr txBox="1"/>
+          <p:nvPr/>
+        </p:nvSpPr>
+        <p:spPr>
+          <a:xfrm>
+            <a:off x="731520" y="5212080"/>
+            <a:ext cx="6949440" cy="822960"/>
+          </a:xfrm>
+          <a:prstGeom prst="rect">
+            <a:avLst/>
+          </a:prstGeom>
+          <a:noFill/>
+          <a:ln/>
+        </p:spPr>
+        <p:txBody>
+          <a:bodyPr wrap="square" rtlCol="0" anchor="ctr"/>
+          <a:lstStyle/>
+          <a:p>
+            <a:pPr indent="0" marL="0">
+              <a:buNone/>
+            </a:pPr>
+            <a:r>
+              <a:rPr lang="en-US" sz="1600" i="1" dirty="0">
+                <a:solidFill>
+                  <a:schemeClr val="accent1"/>
+                </a:solidFill>
+              </a:rPr>
+              <a:t>~0.1 s per episode in 2D vs ~5 min per episode in Gazebo: the reason training happens here</a:t>
+            </a:r>
+            <a:endParaRPr lang="en-US" sz="1600" dirty="0"/>
           </a:p>
         </p:txBody>
       </p:sp>
@@ -4013,7 +4478,7 @@
                 <a:ea typeface="Cambria" pitchFamily="34" charset="-122"/>
                 <a:cs typeface="Cambria" pitchFamily="34" charset="-120"/>
               </a:rPr>
-              <a:t>Sim-to-sim transfer: ros_policy_node</a:t>
+              <a:t>Training converges within ~30k decisions</a:t>
             </a:r>
             <a:endParaRPr lang="en-US" sz="3200" dirty="0"/>
           </a:p>
@@ -4021,7 +4486,7 @@
       </p:sp>
       <p:pic>
         <p:nvPicPr>
-          <p:cNvPr id="3" name="Image 0" descr="05 policy node tick">    </p:cNvPr>
+          <p:cNvPr id="3" name="Image 0" descr="20 training dashboard">    </p:cNvPr>
           <p:cNvPicPr>
             <a:picLocks noChangeAspect="1"/>
           </p:cNvPicPr>
@@ -4035,8 +4500,8 @@
         </p:blipFill>
         <p:spPr>
           <a:xfrm>
-            <a:off x="548640" y="1245589"/>
-            <a:ext cx="7680960" cy="3909621"/>
+            <a:off x="459570" y="1143000"/>
+            <a:ext cx="7859100" cy="5486400"/>
           </a:xfrm>
           <a:prstGeom prst="rect">
             <a:avLst/>
@@ -4051,8 +4516,8 @@
         </p:nvSpPr>
         <p:spPr>
           <a:xfrm>
-            <a:off x="8412480" y="1371600"/>
-            <a:ext cx="3383280" cy="4937760"/>
+            <a:off x="8503920" y="1371600"/>
+            <a:ext cx="3291840" cy="5029200"/>
           </a:xfrm>
           <a:prstGeom prst="rect">
             <a:avLst/>
@@ -4077,7 +4542,7 @@
                   <a:schemeClr val="tx1"/>
                 </a:solidFill>
               </a:rPr>
-              <a:t>Every second: the live /map is resampled onto the training grid</a:t>
+              <a:t>Reward passes the heuristic level (dashed) and stays flat</a:t>
             </a:r>
             <a:endParaRPr lang="en-US" sz="1500" dirty="0"/>
           </a:p>
@@ -4095,7 +4560,7 @@
                   <a:schemeClr val="tx1"/>
                 </a:solidFill>
               </a:rPr>
-              <a:t>Robot poses come from TF; goal state comes from Nav2 results</a:t>
+              <a:t>Entropy → 0: the policy becomes confident</a:t>
             </a:r>
             <a:endParaRPr lang="en-US" sz="1500" dirty="0"/>
           </a:p>
@@ -4113,7 +4578,7 @@
                   <a:schemeClr val="tx1"/>
                 </a:solidFill>
               </a:rPr>
-              <a:t>The same env code builds the observation, so there's no reimplementation drift</a:t>
+              <a:t>Explained variance → 1: the critic predicts returns</a:t>
             </a:r>
             <a:endParaRPr lang="en-US" sz="1500" dirty="0"/>
           </a:p>
@@ -4131,7 +4596,25 @@
                   <a:schemeClr val="tx1"/>
                 </a:solidFill>
               </a:rPr>
-              <a:t>--policy heuristic runs the baseline through identical goal handling</a:t>
+              <a:t>KL and clip fraction fall to ≈ 0: updates stop changing the policy</a:t>
+            </a:r>
+            <a:endParaRPr lang="en-US" sz="1500" dirty="0"/>
+          </a:p>
+          <a:p>
+            <a:pPr marL="342900" indent="-342900">
+              <a:spcAft>
+                <a:spcPts val="800"/>
+              </a:spcAft>
+              <a:buSzPct val="100000"/>
+              <a:buChar char="•"/>
+            </a:pPr>
+            <a:r>
+              <a:rPr lang="en-US" sz="1500" dirty="0">
+                <a:solidFill>
+                  <a:schemeClr val="tx1"/>
+                </a:solidFill>
+              </a:rPr>
+              <a:t>300k decisions in ~25 min on a laptop CPU</a:t>
             </a:r>
             <a:endParaRPr lang="en-US" sz="1500" dirty="0"/>
           </a:p>
@@ -4242,28 +4725,36 @@
                 <a:ea typeface="Cambria" pitchFamily="34" charset="-122"/>
                 <a:cs typeface="Cambria" pitchFamily="34" charset="-120"/>
               </a:rPr>
-              <a:t>2D simulator: time to fully explore the arena</a:t>
+              <a:t>Sim-to-sim transfer: ros_policy_node</a:t>
             </a:r>
             <a:endParaRPr lang="en-US" sz="3200" dirty="0"/>
           </a:p>
         </p:txBody>
       </p:sp>
-      <p:graphicFrame>
-        <p:nvGraphicFramePr>
-          <p:cNvPr id="3" name="Chart 0" descr=""/>
-          <p:cNvGraphicFramePr/>
+      <p:pic>
+        <p:nvPicPr>
+          <p:cNvPr id="3" name="Image 0" descr="05 policy node tick">    </p:cNvPr>
+          <p:cNvPicPr>
+            <a:picLocks noChangeAspect="1"/>
+          </p:cNvPicPr>
           <p:nvPr/>
-        </p:nvGraphicFramePr>
-        <p:xfrm>
-          <a:off x="548640" y="1280160"/>
-          <a:ext cx="6949440" cy="5120640"/>
-        </p:xfrm>
-        <a:graphic xmlns:a="http://schemas.openxmlformats.org/drawingml/2006/main">
-          <a:graphicData uri="http://schemas.openxmlformats.org/drawingml/2006/chart">
-            <c:chart xmlns:c="http://schemas.openxmlformats.org/drawingml/2006/chart" r:id="rId1"/>
-          </a:graphicData>
-        </a:graphic>
-      </p:graphicFrame>
+        </p:nvPicPr>
+        <p:blipFill>
+          <a:blip r:embed="rId1"/>
+          <a:stretch>
+            <a:fillRect/>
+          </a:stretch>
+        </p:blipFill>
+        <p:spPr>
+          <a:xfrm>
+            <a:off x="548640" y="1245589"/>
+            <a:ext cx="7680960" cy="3909621"/>
+          </a:xfrm>
+          <a:prstGeom prst="rect">
+            <a:avLst/>
+          </a:prstGeom>
+        </p:spPr>
+      </p:pic>
       <p:sp>
         <p:nvSpPr>
           <p:cNvPr id="4" name="Text 1"/>
@@ -4272,8 +4763,8 @@
         </p:nvSpPr>
         <p:spPr>
           <a:xfrm>
-            <a:off x="7955280" y="1554480"/>
-            <a:ext cx="3657600" cy="822960"/>
+            <a:off x="8412480" y="1371600"/>
+            <a:ext cx="3383280" cy="4937760"/>
           </a:xfrm>
           <a:prstGeom prst="rect">
             <a:avLst/>
@@ -4282,171 +4773,79 @@
           <a:ln/>
         </p:spPr>
         <p:txBody>
-          <a:bodyPr wrap="square" lIns="0" tIns="0" rIns="0" bIns="0" rtlCol="0" anchor="ctr"/>
-          <a:lstStyle/>
-          <a:p>
-            <a:pPr indent="0" marL="0">
-              <a:buNone/>
-            </a:pPr>
-            <a:r>
-              <a:rPr lang="en-US" sz="4400" b="1" dirty="0">
-                <a:solidFill>
-                  <a:srgbClr val="1F77B4"/>
-                </a:solidFill>
-                <a:latin typeface="Cambria" pitchFamily="34" charset="0"/>
-                <a:ea typeface="Cambria" pitchFamily="34" charset="-122"/>
-                <a:cs typeface="Cambria" pitchFamily="34" charset="-120"/>
-              </a:rPr>
-              <a:t>−10 %</a:t>
-            </a:r>
-            <a:endParaRPr lang="en-US" sz="4400" dirty="0"/>
-          </a:p>
-        </p:txBody>
-      </p:sp>
-      <p:sp>
-        <p:nvSpPr>
-          <p:cNvPr id="5" name="Text 2"/>
-          <p:cNvSpPr txBox="1"/>
-          <p:nvPr/>
-        </p:nvSpPr>
-        <p:spPr>
-          <a:xfrm>
-            <a:off x="7955280" y="2377440"/>
-            <a:ext cx="3657600" cy="640080"/>
-          </a:xfrm>
-          <a:prstGeom prst="rect">
-            <a:avLst/>
-          </a:prstGeom>
-          <a:noFill/>
-          <a:ln/>
-        </p:spPr>
-        <p:txBody>
-          <a:bodyPr wrap="square" lIns="0" tIns="0" rIns="0" bIns="0" rtlCol="0" anchor="t"/>
-          <a:lstStyle/>
-          <a:p>
-            <a:pPr indent="0" marL="0">
-              <a:buNone/>
-            </a:pPr>
-            <a:r>
-              <a:rPr lang="en-US" sz="1400" dirty="0">
-                <a:solidFill>
-                  <a:srgbClr val="5B6B7A"/>
-                </a:solidFill>
-              </a:rPr>
-              <a:t>exploration time vs the heuristic (65.5 s vs 72.5 s)</a:t>
-            </a:r>
-            <a:endParaRPr lang="en-US" sz="1400" dirty="0"/>
-          </a:p>
-        </p:txBody>
-      </p:sp>
-      <p:sp>
-        <p:nvSpPr>
-          <p:cNvPr id="6" name="Text 3"/>
-          <p:cNvSpPr txBox="1"/>
-          <p:nvPr/>
-        </p:nvSpPr>
-        <p:spPr>
-          <a:xfrm>
-            <a:off x="7955280" y="3291840"/>
-            <a:ext cx="3657600" cy="822960"/>
-          </a:xfrm>
-          <a:prstGeom prst="rect">
-            <a:avLst/>
-          </a:prstGeom>
-          <a:noFill/>
-          <a:ln/>
-        </p:spPr>
-        <p:txBody>
-          <a:bodyPr wrap="square" lIns="0" tIns="0" rIns="0" bIns="0" rtlCol="0" anchor="ctr"/>
-          <a:lstStyle/>
-          <a:p>
-            <a:pPr indent="0" marL="0">
-              <a:buNone/>
-            </a:pPr>
-            <a:r>
-              <a:rPr lang="en-US" sz="4400" b="1" dirty="0">
-                <a:solidFill>
-                  <a:srgbClr val="0E7C86"/>
-                </a:solidFill>
-                <a:latin typeface="Cambria" pitchFamily="34" charset="0"/>
-                <a:ea typeface="Cambria" pitchFamily="34" charset="-122"/>
-                <a:cs typeface="Cambria" pitchFamily="34" charset="-120"/>
-              </a:rPr>
-              <a:t>7 vs 8</a:t>
-            </a:r>
-            <a:endParaRPr lang="en-US" sz="4400" dirty="0"/>
-          </a:p>
-        </p:txBody>
-      </p:sp>
-      <p:sp>
-        <p:nvSpPr>
-          <p:cNvPr id="7" name="Text 4"/>
-          <p:cNvSpPr txBox="1"/>
-          <p:nvPr/>
-        </p:nvSpPr>
-        <p:spPr>
-          <a:xfrm>
-            <a:off x="7955280" y="4114800"/>
-            <a:ext cx="3657600" cy="640080"/>
-          </a:xfrm>
-          <a:prstGeom prst="rect">
-            <a:avLst/>
-          </a:prstGeom>
-          <a:noFill/>
-          <a:ln/>
-        </p:spPr>
-        <p:txBody>
-          <a:bodyPr wrap="square" lIns="0" tIns="0" rIns="0" bIns="0" rtlCol="0" anchor="t"/>
-          <a:lstStyle/>
-          <a:p>
-            <a:pPr indent="0" marL="0">
-              <a:buNone/>
-            </a:pPr>
-            <a:r>
-              <a:rPr lang="en-US" sz="1400" dirty="0">
-                <a:solidFill>
-                  <a:srgbClr val="5B6B7A"/>
-                </a:solidFill>
-              </a:rPr>
-              <a:t>decisions per episode: fewer, better-chosen trips</a:t>
-            </a:r>
-            <a:endParaRPr lang="en-US" sz="1400" dirty="0"/>
-          </a:p>
-        </p:txBody>
-      </p:sp>
-      <p:sp>
-        <p:nvSpPr>
-          <p:cNvPr id="8" name="Text 5"/>
-          <p:cNvSpPr txBox="1"/>
-          <p:nvPr/>
-        </p:nvSpPr>
-        <p:spPr>
-          <a:xfrm>
-            <a:off x="7955280" y="5120640"/>
-            <a:ext cx="3657600" cy="548640"/>
-          </a:xfrm>
-          <a:prstGeom prst="rect">
-            <a:avLst/>
-          </a:prstGeom>
-          <a:noFill/>
-          <a:ln/>
-        </p:spPr>
-        <p:txBody>
-          <a:bodyPr wrap="square" lIns="0" tIns="0" rIns="0" bIns="0" rtlCol="0" anchor="ctr"/>
-          <a:lstStyle/>
-          <a:p>
-            <a:pPr indent="0" marL="0">
-              <a:buNone/>
-            </a:pPr>
-            <a:r>
-              <a:rPr lang="en-US" sz="1400" dirty="0">
-                <a:solidFill>
-                  <a:srgbClr val="5B6B7A"/>
-                </a:solidFill>
-              </a:rPr>
-              <a:t>Deterministic simulator: one episode is exact.</a:t>
-            </a:r>
-            <a:endParaRPr lang="en-US" sz="1400" dirty="0"/>
+          <a:bodyPr wrap="square" rtlCol="0" anchor="t"/>
+          <a:lstStyle/>
+          <a:p>
+            <a:pPr marL="342900" indent="-342900">
+              <a:spcAft>
+                <a:spcPts val="800"/>
+              </a:spcAft>
+              <a:buSzPct val="100000"/>
+              <a:buChar char="•"/>
+            </a:pPr>
+            <a:r>
+              <a:rPr lang="en-US" sz="1500" dirty="0">
+                <a:solidFill>
+                  <a:schemeClr val="tx1"/>
+                </a:solidFill>
+              </a:rPr>
+              <a:t>Every second: the live /map is resampled onto the training grid</a:t>
+            </a:r>
+            <a:endParaRPr lang="en-US" sz="1500" dirty="0"/>
+          </a:p>
+          <a:p>
+            <a:pPr marL="342900" indent="-342900">
+              <a:spcAft>
+                <a:spcPts val="800"/>
+              </a:spcAft>
+              <a:buSzPct val="100000"/>
+              <a:buChar char="•"/>
+            </a:pPr>
+            <a:r>
+              <a:rPr lang="en-US" sz="1500" dirty="0">
+                <a:solidFill>
+                  <a:schemeClr val="tx1"/>
+                </a:solidFill>
+              </a:rPr>
+              <a:t>Robot poses come from TF; goal state comes from Nav2 results</a:t>
+            </a:r>
+            <a:endParaRPr lang="en-US" sz="1500" dirty="0"/>
+          </a:p>
+          <a:p>
+            <a:pPr marL="342900" indent="-342900">
+              <a:spcAft>
+                <a:spcPts val="800"/>
+              </a:spcAft>
+              <a:buSzPct val="100000"/>
+              <a:buChar char="•"/>
+            </a:pPr>
+            <a:r>
+              <a:rPr lang="en-US" sz="1500" dirty="0">
+                <a:solidFill>
+                  <a:schemeClr val="tx1"/>
+                </a:solidFill>
+              </a:rPr>
+              <a:t>The same env code builds the observation, so there's no reimplementation drift</a:t>
+            </a:r>
+            <a:endParaRPr lang="en-US" sz="1500" dirty="0"/>
+          </a:p>
+          <a:p>
+            <a:pPr marL="342900" indent="-342900">
+              <a:spcAft>
+                <a:spcPts val="800"/>
+              </a:spcAft>
+              <a:buSzPct val="100000"/>
+              <a:buChar char="•"/>
+            </a:pPr>
+            <a:r>
+              <a:rPr lang="en-US" sz="1500" dirty="0">
+                <a:solidFill>
+                  <a:schemeClr val="tx1"/>
+                </a:solidFill>
+              </a:rPr>
+              <a:t>--policy heuristic runs the baseline through identical goal handling</a:t>
+            </a:r>
+            <a:endParaRPr lang="en-US" sz="1500" dirty="0"/>
           </a:p>
         </p:txBody>
       </p:sp>
@@ -4555,36 +4954,28 @@
                 <a:ea typeface="Cambria" pitchFamily="34" charset="-122"/>
                 <a:cs typeface="Cambria" pitchFamily="34" charset="-120"/>
               </a:rPr>
-              <a:t>Gazebo: the advantage transfers to the full stack</a:t>
+              <a:t>2D simulator: time to fully explore the arena</a:t>
             </a:r>
             <a:endParaRPr lang="en-US" sz="3200" dirty="0"/>
           </a:p>
         </p:txBody>
       </p:sp>
-      <p:pic>
-        <p:nvPicPr>
-          <p:cNvPr id="3" name="Image 0" descr="04 gazebo coverage over time">    </p:cNvPr>
-          <p:cNvPicPr>
-            <a:picLocks noChangeAspect="1"/>
-          </p:cNvPicPr>
+      <p:graphicFrame>
+        <p:nvGraphicFramePr>
+          <p:cNvPr id="3" name="Chart 0" descr=""/>
+          <p:cNvGraphicFramePr/>
           <p:nvPr/>
-        </p:nvPicPr>
-        <p:blipFill>
-          <a:blip r:embed="rId1"/>
-          <a:stretch>
-            <a:fillRect/>
-          </a:stretch>
-        </p:blipFill>
-        <p:spPr>
-          <a:xfrm>
-            <a:off x="548640" y="1407284"/>
-            <a:ext cx="7132320" cy="4683512"/>
-          </a:xfrm>
-          <a:prstGeom prst="rect">
-            <a:avLst/>
-          </a:prstGeom>
-        </p:spPr>
-      </p:pic>
+        </p:nvGraphicFramePr>
+        <p:xfrm>
+          <a:off x="548640" y="1280160"/>
+          <a:ext cx="6949440" cy="5120640"/>
+        </p:xfrm>
+        <a:graphic xmlns:a="http://schemas.openxmlformats.org/drawingml/2006/main">
+          <a:graphicData uri="http://schemas.openxmlformats.org/drawingml/2006/chart">
+            <c:chart xmlns:c="http://schemas.openxmlformats.org/drawingml/2006/chart" r:id="rId1"/>
+          </a:graphicData>
+        </a:graphic>
+      </p:graphicFrame>
       <p:sp>
         <p:nvSpPr>
           <p:cNvPr id="4" name="Text 1"/>
@@ -4593,7 +4984,7 @@
         </p:nvSpPr>
         <p:spPr>
           <a:xfrm>
-            <a:off x="8046720" y="1371600"/>
+            <a:off x="7955280" y="1554480"/>
             <a:ext cx="3657600" cy="822960"/>
           </a:xfrm>
           <a:prstGeom prst="rect">
@@ -4618,7 +5009,7 @@
                 <a:ea typeface="Cambria" pitchFamily="34" charset="-122"/>
                 <a:cs typeface="Cambria" pitchFamily="34" charset="-120"/>
               </a:rPr>
-              <a:t>41.8 m²</a:t>
+              <a:t>−40 %</a:t>
             </a:r>
             <a:endParaRPr lang="en-US" sz="4400" dirty="0"/>
           </a:p>
@@ -4632,7 +5023,7 @@
         </p:nvSpPr>
         <p:spPr>
           <a:xfrm>
-            <a:off x="8046720" y="2194560"/>
+            <a:off x="7955280" y="2377440"/>
             <a:ext cx="3657600" cy="640080"/>
           </a:xfrm>
           <a:prstGeom prst="rect">
@@ -4654,7 +5045,7 @@
                   <a:srgbClr val="5B6B7A"/>
                 </a:solidFill>
               </a:rPr>
-              <a:t>PPO, known area after 240 s (± 2.5)</a:t>
+              <a:t>exploration time vs the heuristic (67 s vs 111 s)</a:t>
             </a:r>
             <a:endParaRPr lang="en-US" sz="1400" dirty="0"/>
           </a:p>
@@ -4668,7 +5059,7 @@
         </p:nvSpPr>
         <p:spPr>
           <a:xfrm>
-            <a:off x="8046720" y="2834640"/>
+            <a:off x="7955280" y="3291840"/>
             <a:ext cx="3657600" cy="822960"/>
           </a:xfrm>
           <a:prstGeom prst="rect">
@@ -4687,13 +5078,13 @@
             <a:r>
               <a:rPr lang="en-US" sz="4400" b="1" dirty="0">
                 <a:solidFill>
-                  <a:srgbClr val="D62728"/>
+                  <a:srgbClr val="0E7C86"/>
                 </a:solidFill>
                 <a:latin typeface="Cambria" pitchFamily="34" charset="0"/>
                 <a:ea typeface="Cambria" pitchFamily="34" charset="-122"/>
                 <a:cs typeface="Cambria" pitchFamily="34" charset="-120"/>
               </a:rPr>
-              <a:t>36.2 m²</a:t>
+              <a:t>7 vs 9</a:t>
             </a:r>
             <a:endParaRPr lang="en-US" sz="4400" dirty="0"/>
           </a:p>
@@ -4707,7 +5098,7 @@
         </p:nvSpPr>
         <p:spPr>
           <a:xfrm>
-            <a:off x="8046720" y="3657600"/>
+            <a:off x="7955280" y="4114800"/>
             <a:ext cx="3657600" cy="640080"/>
           </a:xfrm>
           <a:prstGeom prst="rect">
@@ -4729,7 +5120,7 @@
                   <a:srgbClr val="5B6B7A"/>
                 </a:solidFill>
               </a:rPr>
-              <a:t>Heuristic, known area after 240 s (± 4.0)</a:t>
+              <a:t>decisions per episode: fewer, better-chosen trips</a:t>
             </a:r>
             <a:endParaRPr lang="en-US" sz="1400" dirty="0"/>
           </a:p>
@@ -4743,8 +5134,8 @@
         </p:nvSpPr>
         <p:spPr>
           <a:xfrm>
-            <a:off x="8046720" y="4297680"/>
-            <a:ext cx="3657600" cy="822960"/>
+            <a:off x="7955280" y="5120640"/>
+            <a:ext cx="3657600" cy="548640"/>
           </a:xfrm>
           <a:prstGeom prst="rect">
             <a:avLst/>
@@ -4760,89 +5151,14 @@
               <a:buNone/>
             </a:pPr>
             <a:r>
-              <a:rPr lang="en-US" sz="4400" b="1" dirty="0">
-                <a:solidFill>
-                  <a:srgbClr val="0E7C86"/>
-                </a:solidFill>
-                <a:latin typeface="Cambria" pitchFamily="34" charset="0"/>
-                <a:ea typeface="Cambria" pitchFamily="34" charset="-122"/>
-                <a:cs typeface="Cambria" pitchFamily="34" charset="-120"/>
-              </a:rPr>
-              <a:t>−30 %</a:t>
-            </a:r>
-            <a:endParaRPr lang="en-US" sz="4400" dirty="0"/>
-          </a:p>
-        </p:txBody>
-      </p:sp>
-      <p:sp>
-        <p:nvSpPr>
-          <p:cNvPr id="9" name="Text 6"/>
-          <p:cNvSpPr txBox="1"/>
-          <p:nvPr/>
-        </p:nvSpPr>
-        <p:spPr>
-          <a:xfrm>
-            <a:off x="8046720" y="5120640"/>
-            <a:ext cx="3657600" cy="640080"/>
-          </a:xfrm>
-          <a:prstGeom prst="rect">
-            <a:avLst/>
-          </a:prstGeom>
-          <a:noFill/>
-          <a:ln/>
-        </p:spPr>
-        <p:txBody>
-          <a:bodyPr wrap="square" lIns="0" tIns="0" rIns="0" bIns="0" rtlCol="0" anchor="t"/>
-          <a:lstStyle/>
-          <a:p>
-            <a:pPr indent="0" marL="0">
-              <a:buNone/>
-            </a:pPr>
-            <a:r>
               <a:rPr lang="en-US" sz="1400" dirty="0">
                 <a:solidFill>
                   <a:srgbClr val="5B6B7A"/>
                 </a:solidFill>
               </a:rPr>
-              <a:t>time to map 30 m² (121 s vs 173 s, p = 0.031)</a:t>
+              <a:t>Deterministic simulator: one episode is exact.</a:t>
             </a:r>
             <a:endParaRPr lang="en-US" sz="1400" dirty="0"/>
-          </a:p>
-        </p:txBody>
-      </p:sp>
-      <p:sp>
-        <p:nvSpPr>
-          <p:cNvPr id="10" name="Text 7"/>
-          <p:cNvSpPr txBox="1"/>
-          <p:nvPr/>
-        </p:nvSpPr>
-        <p:spPr>
-          <a:xfrm>
-            <a:off x="548640" y="6355080"/>
-            <a:ext cx="7132320" cy="365760"/>
-          </a:xfrm>
-          <a:prstGeom prst="rect">
-            <a:avLst/>
-          </a:prstGeom>
-          <a:noFill/>
-          <a:ln/>
-        </p:spPr>
-        <p:txBody>
-          <a:bodyPr wrap="square" rtlCol="0" anchor="ctr"/>
-          <a:lstStyle/>
-          <a:p>
-            <a:pPr algn="ctr" indent="0" marL="0">
-              <a:buNone/>
-            </a:pPr>
-            <a:r>
-              <a:rPr lang="en-US" sz="1200" dirty="0">
-                <a:solidFill>
-                  <a:srgbClr val="5B6B7A"/>
-                </a:solidFill>
-              </a:rPr>
-              <a:t>8 alternating paired headless runs, 240 s each</a:t>
-            </a:r>
-            <a:endParaRPr lang="en-US" sz="1200" dirty="0"/>
           </a:p>
         </p:txBody>
       </p:sp>
@@ -4951,7 +5267,403 @@
                 <a:ea typeface="Cambria" pitchFamily="34" charset="-122"/>
                 <a:cs typeface="Cambria" pitchFamily="34" charset="-120"/>
               </a:rPr>
-              <a:t>PPO is ahead at every checkpoint and in every pair</a:t>
+              <a:t>Gazebo: the advantage transfers to the full stack</a:t>
+            </a:r>
+            <a:endParaRPr lang="en-US" sz="3200" dirty="0"/>
+          </a:p>
+        </p:txBody>
+      </p:sp>
+      <p:pic>
+        <p:nvPicPr>
+          <p:cNvPr id="3" name="Image 0" descr="04 gazebo coverage over time">    </p:cNvPr>
+          <p:cNvPicPr>
+            <a:picLocks noChangeAspect="1"/>
+          </p:cNvPicPr>
+          <p:nvPr/>
+        </p:nvPicPr>
+        <p:blipFill>
+          <a:blip r:embed="rId1"/>
+          <a:stretch>
+            <a:fillRect/>
+          </a:stretch>
+        </p:blipFill>
+        <p:spPr>
+          <a:xfrm>
+            <a:off x="548640" y="1407284"/>
+            <a:ext cx="7132320" cy="4683512"/>
+          </a:xfrm>
+          <a:prstGeom prst="rect">
+            <a:avLst/>
+          </a:prstGeom>
+        </p:spPr>
+      </p:pic>
+      <p:sp>
+        <p:nvSpPr>
+          <p:cNvPr id="4" name="Text 1"/>
+          <p:cNvSpPr txBox="1"/>
+          <p:nvPr/>
+        </p:nvSpPr>
+        <p:spPr>
+          <a:xfrm>
+            <a:off x="8046720" y="1371600"/>
+            <a:ext cx="3657600" cy="822960"/>
+          </a:xfrm>
+          <a:prstGeom prst="rect">
+            <a:avLst/>
+          </a:prstGeom>
+          <a:noFill/>
+          <a:ln/>
+        </p:spPr>
+        <p:txBody>
+          <a:bodyPr wrap="square" lIns="0" tIns="0" rIns="0" bIns="0" rtlCol="0" anchor="ctr"/>
+          <a:lstStyle/>
+          <a:p>
+            <a:pPr indent="0" marL="0">
+              <a:buNone/>
+            </a:pPr>
+            <a:r>
+              <a:rPr lang="en-US" sz="4400" b="1" dirty="0">
+                <a:solidFill>
+                  <a:srgbClr val="1F77B4"/>
+                </a:solidFill>
+                <a:latin typeface="Cambria" pitchFamily="34" charset="0"/>
+                <a:ea typeface="Cambria" pitchFamily="34" charset="-122"/>
+                <a:cs typeface="Cambria" pitchFamily="34" charset="-120"/>
+              </a:rPr>
+              <a:t>36.7 m²</a:t>
+            </a:r>
+            <a:endParaRPr lang="en-US" sz="4400" dirty="0"/>
+          </a:p>
+        </p:txBody>
+      </p:sp>
+      <p:sp>
+        <p:nvSpPr>
+          <p:cNvPr id="5" name="Text 2"/>
+          <p:cNvSpPr txBox="1"/>
+          <p:nvPr/>
+        </p:nvSpPr>
+        <p:spPr>
+          <a:xfrm>
+            <a:off x="8046720" y="2194560"/>
+            <a:ext cx="3657600" cy="640080"/>
+          </a:xfrm>
+          <a:prstGeom prst="rect">
+            <a:avLst/>
+          </a:prstGeom>
+          <a:noFill/>
+          <a:ln/>
+        </p:spPr>
+        <p:txBody>
+          <a:bodyPr wrap="square" lIns="0" tIns="0" rIns="0" bIns="0" rtlCol="0" anchor="t"/>
+          <a:lstStyle/>
+          <a:p>
+            <a:pPr indent="0" marL="0">
+              <a:buNone/>
+            </a:pPr>
+            <a:r>
+              <a:rPr lang="en-US" sz="1400" dirty="0">
+                <a:solidFill>
+                  <a:srgbClr val="5B6B7A"/>
+                </a:solidFill>
+              </a:rPr>
+              <a:t>PPO, known area at 180 s (± 2.8)</a:t>
+            </a:r>
+            <a:endParaRPr lang="en-US" sz="1400" dirty="0"/>
+          </a:p>
+        </p:txBody>
+      </p:sp>
+      <p:sp>
+        <p:nvSpPr>
+          <p:cNvPr id="6" name="Text 3"/>
+          <p:cNvSpPr txBox="1"/>
+          <p:nvPr/>
+        </p:nvSpPr>
+        <p:spPr>
+          <a:xfrm>
+            <a:off x="8046720" y="2834640"/>
+            <a:ext cx="3657600" cy="822960"/>
+          </a:xfrm>
+          <a:prstGeom prst="rect">
+            <a:avLst/>
+          </a:prstGeom>
+          <a:noFill/>
+          <a:ln/>
+        </p:spPr>
+        <p:txBody>
+          <a:bodyPr wrap="square" lIns="0" tIns="0" rIns="0" bIns="0" rtlCol="0" anchor="ctr"/>
+          <a:lstStyle/>
+          <a:p>
+            <a:pPr indent="0" marL="0">
+              <a:buNone/>
+            </a:pPr>
+            <a:r>
+              <a:rPr lang="en-US" sz="4400" b="1" dirty="0">
+                <a:solidFill>
+                  <a:srgbClr val="D62728"/>
+                </a:solidFill>
+                <a:latin typeface="Cambria" pitchFamily="34" charset="0"/>
+                <a:ea typeface="Cambria" pitchFamily="34" charset="-122"/>
+                <a:cs typeface="Cambria" pitchFamily="34" charset="-120"/>
+              </a:rPr>
+              <a:t>32.4 m²</a:t>
+            </a:r>
+            <a:endParaRPr lang="en-US" sz="4400" dirty="0"/>
+          </a:p>
+        </p:txBody>
+      </p:sp>
+      <p:sp>
+        <p:nvSpPr>
+          <p:cNvPr id="7" name="Text 4"/>
+          <p:cNvSpPr txBox="1"/>
+          <p:nvPr/>
+        </p:nvSpPr>
+        <p:spPr>
+          <a:xfrm>
+            <a:off x="8046720" y="3657600"/>
+            <a:ext cx="3657600" cy="640080"/>
+          </a:xfrm>
+          <a:prstGeom prst="rect">
+            <a:avLst/>
+          </a:prstGeom>
+          <a:noFill/>
+          <a:ln/>
+        </p:spPr>
+        <p:txBody>
+          <a:bodyPr wrap="square" lIns="0" tIns="0" rIns="0" bIns="0" rtlCol="0" anchor="t"/>
+          <a:lstStyle/>
+          <a:p>
+            <a:pPr indent="0" marL="0">
+              <a:buNone/>
+            </a:pPr>
+            <a:r>
+              <a:rPr lang="en-US" sz="1400" dirty="0">
+                <a:solidFill>
+                  <a:srgbClr val="5B6B7A"/>
+                </a:solidFill>
+              </a:rPr>
+              <a:t>Heuristic, known area at 180 s (± 3.8)</a:t>
+            </a:r>
+            <a:endParaRPr lang="en-US" sz="1400" dirty="0"/>
+          </a:p>
+        </p:txBody>
+      </p:sp>
+      <p:sp>
+        <p:nvSpPr>
+          <p:cNvPr id="8" name="Text 5"/>
+          <p:cNvSpPr txBox="1"/>
+          <p:nvPr/>
+        </p:nvSpPr>
+        <p:spPr>
+          <a:xfrm>
+            <a:off x="8046720" y="4297680"/>
+            <a:ext cx="3657600" cy="822960"/>
+          </a:xfrm>
+          <a:prstGeom prst="rect">
+            <a:avLst/>
+          </a:prstGeom>
+          <a:noFill/>
+          <a:ln/>
+        </p:spPr>
+        <p:txBody>
+          <a:bodyPr wrap="square" lIns="0" tIns="0" rIns="0" bIns="0" rtlCol="0" anchor="ctr"/>
+          <a:lstStyle/>
+          <a:p>
+            <a:pPr indent="0" marL="0">
+              <a:buNone/>
+            </a:pPr>
+            <a:r>
+              <a:rPr lang="en-US" sz="4400" b="1" dirty="0">
+                <a:solidFill>
+                  <a:srgbClr val="0E7C86"/>
+                </a:solidFill>
+                <a:latin typeface="Cambria" pitchFamily="34" charset="0"/>
+                <a:ea typeface="Cambria" pitchFamily="34" charset="-122"/>
+                <a:cs typeface="Cambria" pitchFamily="34" charset="-120"/>
+              </a:rPr>
+              <a:t>−21 %</a:t>
+            </a:r>
+            <a:endParaRPr lang="en-US" sz="4400" dirty="0"/>
+          </a:p>
+        </p:txBody>
+      </p:sp>
+      <p:sp>
+        <p:nvSpPr>
+          <p:cNvPr id="9" name="Text 6"/>
+          <p:cNvSpPr txBox="1"/>
+          <p:nvPr/>
+        </p:nvSpPr>
+        <p:spPr>
+          <a:xfrm>
+            <a:off x="8046720" y="5120640"/>
+            <a:ext cx="3657600" cy="640080"/>
+          </a:xfrm>
+          <a:prstGeom prst="rect">
+            <a:avLst/>
+          </a:prstGeom>
+          <a:noFill/>
+          <a:ln/>
+        </p:spPr>
+        <p:txBody>
+          <a:bodyPr wrap="square" lIns="0" tIns="0" rIns="0" bIns="0" rtlCol="0" anchor="t"/>
+          <a:lstStyle/>
+          <a:p>
+            <a:pPr indent="0" marL="0">
+              <a:buNone/>
+            </a:pPr>
+            <a:r>
+              <a:rPr lang="en-US" sz="1400" dirty="0">
+                <a:solidFill>
+                  <a:srgbClr val="5B6B7A"/>
+                </a:solidFill>
+              </a:rPr>
+              <a:t>time to map 30 m² (127 s vs 160 s), 8/8 pairs, p = 0.008</a:t>
+            </a:r>
+            <a:endParaRPr lang="en-US" sz="1400" dirty="0"/>
+          </a:p>
+        </p:txBody>
+      </p:sp>
+      <p:sp>
+        <p:nvSpPr>
+          <p:cNvPr id="10" name="Text 7"/>
+          <p:cNvSpPr txBox="1"/>
+          <p:nvPr/>
+        </p:nvSpPr>
+        <p:spPr>
+          <a:xfrm>
+            <a:off x="548640" y="6355080"/>
+            <a:ext cx="7132320" cy="365760"/>
+          </a:xfrm>
+          <a:prstGeom prst="rect">
+            <a:avLst/>
+          </a:prstGeom>
+          <a:noFill/>
+          <a:ln/>
+        </p:spPr>
+        <p:txBody>
+          <a:bodyPr wrap="square" rtlCol="0" anchor="ctr"/>
+          <a:lstStyle/>
+          <a:p>
+            <a:pPr algn="ctr" indent="0" marL="0">
+              <a:buNone/>
+            </a:pPr>
+            <a:r>
+              <a:rPr lang="en-US" sz="1200" dirty="0">
+                <a:solidFill>
+                  <a:srgbClr val="5B6B7A"/>
+                </a:solidFill>
+              </a:rPr>
+              <a:t>8 alternating paired headless runs, 240 s each</a:t>
+            </a:r>
+            <a:endParaRPr lang="en-US" sz="1200" dirty="0"/>
+          </a:p>
+        </p:txBody>
+      </p:sp>
+      <p:sp>
+        <p:nvSpPr>
+          <p:cNvPr id="25" name="Slide Number Placeholder 0"/>
+          <p:cNvSpPr>
+            <a:spLocks noGrp="1"/>
+          </p:cNvSpPr>
+          <p:nvPr>
+            <p:ph type="sldNum" sz="quarter" idx="4294967295"/>
+          </p:nvPr>
+        </p:nvSpPr>
+        <p:spPr>
+          <a:xfrm>
+            <a:off x="11338560" y="6400800"/>
+            <a:ext cx="548640" cy="274320"/>
+          </a:xfrm>
+          <a:prstGeom prst="rect">
+            <a:avLst/>
+          </a:prstGeom>
+          <a:extLst>
+            <a:ext uri="{C572A759-6A51-4108-AA02-DFA0A04FC94B}">
+              <ma14:wrappingTextBoxFlag xmlns:ma14="http://schemas.microsoft.com/office/mac/drawingml/2011/main" val="0"/>
+            </a:ext>
+          </a:extLst>
+        </p:spPr>
+        <p:txBody>
+          <a:bodyPr/>
+          <a:lstStyle>
+            <a:lvl1pPr>
+              <a:defRPr sz="1000">
+                <a:solidFill>
+                  <a:srgbClr val="5B6B7A"/>
+                </a:solidFill>
+              </a:defRPr>
+            </a:lvl1pPr>
+          </a:lstStyle>
+          <a:p>
+            <a:pPr algn="l"/>
+            <a:fld id="{F7021451-1387-4CA6-816F-3879F97B5CBC}" type="slidenum">
+              <a:rPr b="0" lang="en-US"/>
+              <a:t>14</a:t>
+            </a:fld>
+            <a:endParaRPr lang="en-US"/>
+          </a:p>
+        </p:txBody>
+      </p:sp>
+    </p:spTree>
+  </p:cSld>
+  <p:clrMapOvr>
+    <a:masterClrMapping/>
+  </p:clrMapOvr>
+</p:sld>
+</file>
+
+<file path=ppt/slides/slide15.xml><?xml version="1.0" encoding="utf-8"?>
+<p:sld xmlns:a="http://schemas.openxmlformats.org/drawingml/2006/main" xmlns:r="http://schemas.openxmlformats.org/officeDocument/2006/relationships" xmlns:p="http://schemas.openxmlformats.org/presentationml/2006/main">
+  <p:cSld name="Slide 15">
+    <p:spTree>
+      <p:nvGrpSpPr>
+        <p:cNvPr id="1" name=""/>
+        <p:cNvGrpSpPr/>
+        <p:nvPr/>
+      </p:nvGrpSpPr>
+      <p:grpSpPr>
+        <a:xfrm>
+          <a:off x="0" y="0"/>
+          <a:ext cx="0" cy="0"/>
+          <a:chOff x="0" y="0"/>
+          <a:chExt cx="0" cy="0"/>
+        </a:xfrm>
+      </p:grpSpPr>
+      <p:sp>
+        <p:nvSpPr>
+          <p:cNvPr id="2" name="Text 0"/>
+          <p:cNvSpPr/>
+          <p:nvPr>
+            <p:ph idx="100" type="title" hasCustomPrompt="1"/>
+          </p:nvPr>
+        </p:nvSpPr>
+        <p:spPr>
+          <a:xfrm>
+            <a:off x="548640" y="320040"/>
+            <a:ext cx="11064240" cy="822960"/>
+          </a:xfrm>
+          <a:prstGeom prst="rect">
+            <a:avLst/>
+          </a:prstGeom>
+          <a:noFill/>
+          <a:ln/>
+        </p:spPr>
+        <p:txBody>
+          <a:bodyPr wrap="square" lIns="0" tIns="0" rIns="0" bIns="0" rtlCol="0"/>
+          <a:lstStyle/>
+          <a:p>
+            <a:pPr indent="0" marL="0">
+              <a:buNone/>
+            </a:pPr>
+            <a:r>
+              <a:rPr lang="en-US" sz="3200" b="1" dirty="0">
+                <a:solidFill>
+                  <a:schemeClr val="tx2"/>
+                </a:solidFill>
+                <a:latin typeface="Cambria" pitchFamily="34" charset="0"/>
+                <a:ea typeface="Cambria" pitchFamily="34" charset="-122"/>
+                <a:cs typeface="Cambria" pitchFamily="34" charset="-120"/>
+              </a:rPr>
+              <a:t>PPO maps faster through the run, in every pair</a:t>
             </a:r>
             <a:endParaRPr lang="en-US" sz="3200" dirty="0"/>
           </a:p>
@@ -5019,292 +5731,9 @@
                   <a:srgbClr val="5B6B7A"/>
                 </a:solidFill>
               </a:rPr>
-              <a:t>Exact paired permutation test: p = 0.008 (8/8 pairs positive)</a:t>
+              <a:t>PPO faster in 8/8 pairs (mean −33 s), exact paired permutation p = 0.008</a:t>
             </a:r>
             <a:endParaRPr lang="en-US" sz="1200" dirty="0"/>
-          </a:p>
-        </p:txBody>
-      </p:sp>
-      <p:sp>
-        <p:nvSpPr>
-          <p:cNvPr id="25" name="Slide Number Placeholder 0"/>
-          <p:cNvSpPr>
-            <a:spLocks noGrp="1"/>
-          </p:cNvSpPr>
-          <p:nvPr>
-            <p:ph type="sldNum" sz="quarter" idx="4294967295"/>
-          </p:nvPr>
-        </p:nvSpPr>
-        <p:spPr>
-          <a:xfrm>
-            <a:off x="11338560" y="6400800"/>
-            <a:ext cx="548640" cy="274320"/>
-          </a:xfrm>
-          <a:prstGeom prst="rect">
-            <a:avLst/>
-          </a:prstGeom>
-          <a:extLst>
-            <a:ext uri="{C572A759-6A51-4108-AA02-DFA0A04FC94B}">
-              <ma14:wrappingTextBoxFlag xmlns:ma14="http://schemas.microsoft.com/office/mac/drawingml/2011/main" val="0"/>
-            </a:ext>
-          </a:extLst>
-        </p:spPr>
-        <p:txBody>
-          <a:bodyPr/>
-          <a:lstStyle>
-            <a:lvl1pPr>
-              <a:defRPr sz="1000">
-                <a:solidFill>
-                  <a:srgbClr val="5B6B7A"/>
-                </a:solidFill>
-              </a:defRPr>
-            </a:lvl1pPr>
-          </a:lstStyle>
-          <a:p>
-            <a:pPr algn="l"/>
-            <a:fld id="{F7021451-1387-4CA6-816F-3879F97B5CBC}" type="slidenum">
-              <a:rPr b="0" lang="en-US"/>
-              <a:t>14</a:t>
-            </a:fld>
-            <a:endParaRPr lang="en-US"/>
-          </a:p>
-        </p:txBody>
-      </p:sp>
-    </p:spTree>
-  </p:cSld>
-  <p:clrMapOvr>
-    <a:masterClrMapping/>
-  </p:clrMapOvr>
-</p:sld>
-</file>
-
-<file path=ppt/slides/slide15.xml><?xml version="1.0" encoding="utf-8"?>
-<p:sld xmlns:a="http://schemas.openxmlformats.org/drawingml/2006/main" xmlns:r="http://schemas.openxmlformats.org/officeDocument/2006/relationships" xmlns:p="http://schemas.openxmlformats.org/presentationml/2006/main">
-  <p:cSld name="Slide 15">
-    <p:spTree>
-      <p:nvGrpSpPr>
-        <p:cNvPr id="1" name=""/>
-        <p:cNvGrpSpPr/>
-        <p:nvPr/>
-      </p:nvGrpSpPr>
-      <p:grpSpPr>
-        <a:xfrm>
-          <a:off x="0" y="0"/>
-          <a:ext cx="0" cy="0"/>
-          <a:chOff x="0" y="0"/>
-          <a:chExt cx="0" cy="0"/>
-        </a:xfrm>
-      </p:grpSpPr>
-      <p:sp>
-        <p:nvSpPr>
-          <p:cNvPr id="2" name="Text 0"/>
-          <p:cNvSpPr/>
-          <p:nvPr>
-            <p:ph idx="100" type="title" hasCustomPrompt="1"/>
-          </p:nvPr>
-        </p:nvSpPr>
-        <p:spPr>
-          <a:xfrm>
-            <a:off x="548640" y="320040"/>
-            <a:ext cx="11064240" cy="822960"/>
-          </a:xfrm>
-          <a:prstGeom prst="rect">
-            <a:avLst/>
-          </a:prstGeom>
-          <a:noFill/>
-          <a:ln/>
-        </p:spPr>
-        <p:txBody>
-          <a:bodyPr wrap="square" lIns="0" tIns="0" rIns="0" bIns="0" rtlCol="0"/>
-          <a:lstStyle/>
-          <a:p>
-            <a:pPr indent="0" marL="0">
-              <a:buNone/>
-            </a:pPr>
-            <a:r>
-              <a:rPr lang="en-US" sz="3200" b="1" dirty="0">
-                <a:solidFill>
-                  <a:schemeClr val="tx2"/>
-                </a:solidFill>
-                <a:latin typeface="Cambria" pitchFamily="34" charset="0"/>
-                <a:ea typeface="Cambria" pitchFamily="34" charset="-122"/>
-                <a:cs typeface="Cambria" pitchFamily="34" charset="-120"/>
-              </a:rPr>
-              <a:t>Demo videos</a:t>
-            </a:r>
-            <a:endParaRPr lang="en-US" sz="3200" dirty="0"/>
-          </a:p>
-        </p:txBody>
-      </p:sp>
-      <p:pic>
-        <p:nvPicPr>
-          <p:cNvPr id="3" name="Image 0" descr="demo frame">    </p:cNvPr>
-          <p:cNvPicPr>
-            <a:picLocks noChangeAspect="1"/>
-          </p:cNvPicPr>
-          <p:nvPr/>
-        </p:nvPicPr>
-        <p:blipFill>
-          <a:blip r:embed="rId1"/>
-          <a:stretch>
-            <a:fillRect/>
-          </a:stretch>
-        </p:blipFill>
-        <p:spPr>
-          <a:xfrm>
-            <a:off x="548640" y="1280160"/>
-            <a:ext cx="6766560" cy="3383280"/>
-          </a:xfrm>
-          <a:prstGeom prst="rect">
-            <a:avLst/>
-          </a:prstGeom>
-        </p:spPr>
-      </p:pic>
-      <p:sp>
-        <p:nvSpPr>
-          <p:cNvPr id="4" name="Text 1"/>
-          <p:cNvSpPr txBox="1"/>
-          <p:nvPr/>
-        </p:nvSpPr>
-        <p:spPr>
-          <a:xfrm>
-            <a:off x="548640" y="4754880"/>
-            <a:ext cx="6766560" cy="457200"/>
-          </a:xfrm>
-          <a:prstGeom prst="rect">
-            <a:avLst/>
-          </a:prstGeom>
-          <a:noFill/>
-          <a:ln/>
-        </p:spPr>
-        <p:txBody>
-          <a:bodyPr wrap="square" rtlCol="0" anchor="ctr"/>
-          <a:lstStyle/>
-          <a:p>
-            <a:pPr algn="ctr" indent="0" marL="0">
-              <a:buNone/>
-            </a:pPr>
-            <a:r>
-              <a:rPr lang="en-US" sz="1300" dirty="0">
-                <a:solidFill>
-                  <a:srgbClr val="5B6B7A"/>
-                </a:solidFill>
-              </a:rPr>
-              <a:t>Same moment (t = 20.5 s): PPO has mapped 48.4 m², the heuristic 43.3 m²</a:t>
-            </a:r>
-            <a:endParaRPr lang="en-US" sz="1300" dirty="0"/>
-          </a:p>
-        </p:txBody>
-      </p:sp>
-      <p:sp>
-        <p:nvSpPr>
-          <p:cNvPr id="5" name="Text 2"/>
-          <p:cNvSpPr txBox="1"/>
-          <p:nvPr/>
-        </p:nvSpPr>
-        <p:spPr>
-          <a:xfrm>
-            <a:off x="7589520" y="1371600"/>
-            <a:ext cx="4206240" cy="4846320"/>
-          </a:xfrm>
-          <a:prstGeom prst="rect">
-            <a:avLst/>
-          </a:prstGeom>
-          <a:noFill/>
-          <a:ln/>
-        </p:spPr>
-        <p:txBody>
-          <a:bodyPr wrap="square" rtlCol="0" anchor="t"/>
-          <a:lstStyle/>
-          <a:p>
-            <a:pPr marL="342900" indent="-342900">
-              <a:spcAft>
-                <a:spcPts val="800"/>
-              </a:spcAft>
-              <a:buSzPct val="100000"/>
-              <a:buChar char="•"/>
-            </a:pPr>
-            <a:r>
-              <a:rPr lang="en-US" sz="1500" dirty="0">
-                <a:solidFill>
-                  <a:schemeClr val="tx1"/>
-                </a:solidFill>
-              </a:rPr>
-              <a:t>sim2d_ppo_vs_heuristic: side-by-side main result</a:t>
-            </a:r>
-            <a:endParaRPr lang="en-US" sz="1500" dirty="0"/>
-          </a:p>
-          <a:p>
-            <a:pPr marL="342900" indent="-342900">
-              <a:spcAft>
-                <a:spcPts val="800"/>
-              </a:spcAft>
-              <a:buSzPct val="100000"/>
-              <a:buChar char="•"/>
-            </a:pPr>
-            <a:r>
-              <a:rPr lang="en-US" sz="1500" dirty="0">
-                <a:solidFill>
-                  <a:schemeClr val="tx1"/>
-                </a:solidFill>
-              </a:rPr>
-              <a:t>sim2d_ppo: the learned policy alone</a:t>
-            </a:r>
-            <a:endParaRPr lang="en-US" sz="1500" dirty="0"/>
-          </a:p>
-          <a:p>
-            <a:pPr marL="342900" indent="-342900">
-              <a:spcAft>
-                <a:spcPts val="800"/>
-              </a:spcAft>
-              <a:buSzPct val="100000"/>
-              <a:buChar char="•"/>
-            </a:pPr>
-            <a:r>
-              <a:rPr lang="en-US" sz="1500" dirty="0">
-                <a:solidFill>
-                  <a:schemeClr val="tx1"/>
-                </a:solidFill>
-              </a:rPr>
-              <a:t>sim2d_heuristic: the hand-designed coordinator rule</a:t>
-            </a:r>
-            <a:endParaRPr lang="en-US" sz="1500" dirty="0"/>
-          </a:p>
-          <a:p>
-            <a:pPr marL="342900" indent="-342900">
-              <a:spcAft>
-                <a:spcPts val="800"/>
-              </a:spcAft>
-              <a:buSzPct val="100000"/>
-              <a:buChar char="•"/>
-            </a:pPr>
-            <a:r>
-              <a:rPr lang="en-US" sz="1500" dirty="0">
-                <a:solidFill>
-                  <a:schemeClr val="tx1"/>
-                </a:solidFill>
-              </a:rPr>
-              <a:t>sim2d_nearest, sim2d_random: baselines</a:t>
-            </a:r>
-            <a:endParaRPr lang="en-US" sz="1500" dirty="0"/>
-          </a:p>
-          <a:p>
-            <a:pPr marL="342900" indent="-342900">
-              <a:spcAft>
-                <a:spcPts val="800"/>
-              </a:spcAft>
-              <a:buSzPct val="100000"/>
-              <a:buChar char="•"/>
-            </a:pPr>
-            <a:r>
-              <a:rPr lang="en-US" sz="1500" dirty="0">
-                <a:solidFill>
-                  <a:schemeClr val="tx1"/>
-                </a:solidFill>
-              </a:rPr>
-              <a:t>All in final-product/media/demo-videos, with descriptions</a:t>
-            </a:r>
-            <a:endParaRPr lang="en-US" sz="1500" dirty="0"/>
           </a:p>
         </p:txBody>
       </p:sp>
@@ -5413,441 +5842,82 @@
                 <a:ea typeface="Cambria" pitchFamily="34" charset="-122"/>
                 <a:cs typeface="Cambria" pitchFamily="34" charset="-120"/>
               </a:rPr>
-              <a:t>Repository and how to run</a:t>
+              <a:t>Demo videos</a:t>
             </a:r>
             <a:endParaRPr lang="en-US" sz="3200" dirty="0"/>
           </a:p>
         </p:txBody>
       </p:sp>
-      <p:sp>
-        <p:nvSpPr>
-          <p:cNvPr id="3" name="Text 1"/>
+      <p:pic>
+        <p:nvPicPr>
+          <p:cNvPr id="3" name="Image 0" descr="demo frame">    </p:cNvPr>
+          <p:cNvPicPr>
+            <a:picLocks noChangeAspect="1"/>
+          </p:cNvPicPr>
+          <p:nvPr/>
+        </p:nvPicPr>
+        <p:blipFill>
+          <a:blip r:embed="rId1"/>
+          <a:stretch>
+            <a:fillRect/>
+          </a:stretch>
+        </p:blipFill>
+        <p:spPr>
+          <a:xfrm>
+            <a:off x="548640" y="1280160"/>
+            <a:ext cx="6766560" cy="3383280"/>
+          </a:xfrm>
+          <a:prstGeom prst="rect">
+            <a:avLst/>
+          </a:prstGeom>
+        </p:spPr>
+      </p:pic>
+      <p:sp>
+        <p:nvSpPr>
+          <p:cNvPr id="4" name="Text 1"/>
           <p:cNvSpPr txBox="1"/>
           <p:nvPr/>
         </p:nvSpPr>
         <p:spPr>
           <a:xfrm>
-            <a:off x="548640" y="1371600"/>
-            <a:ext cx="5760720" cy="2377440"/>
-          </a:xfrm>
-          <a:prstGeom prst="rect">
-            <a:avLst/>
-          </a:prstGeom>
-          <a:solidFill>
-            <a:srgbClr val="EEF3F7"/>
-          </a:solidFill>
+            <a:off x="548640" y="4754880"/>
+            <a:ext cx="6766560" cy="457200"/>
+          </a:xfrm>
+          <a:prstGeom prst="rect">
+            <a:avLst/>
+          </a:prstGeom>
+          <a:noFill/>
           <a:ln/>
         </p:spPr>
         <p:txBody>
-          <a:bodyPr wrap="square" lIns="152400" tIns="152400" rIns="152400" bIns="152400" rtlCol="0" anchor="t"/>
-          <a:lstStyle/>
-          <a:p>
-            <a:pPr indent="0" marL="0">
+          <a:bodyPr wrap="square" rtlCol="0" anchor="ctr"/>
+          <a:lstStyle/>
+          <a:p>
+            <a:pPr algn="ctr" indent="0" marL="0">
               <a:buNone/>
             </a:pPr>
             <a:r>
-              <a:rPr lang="en-US" sz="1300" b="1" dirty="0">
-                <a:solidFill>
-                  <a:schemeClr val="tx1"/>
-                </a:solidFill>
-                <a:latin typeface="Courier New" pitchFamily="34" charset="0"/>
-                <a:ea typeface="Courier New" pitchFamily="34" charset="-122"/>
-                <a:cs typeface="Courier New" pitchFamily="34" charset="-120"/>
-              </a:rPr>
-              <a:t>final-product/</a:t>
+              <a:rPr lang="en-US" sz="1300" dirty="0">
+                <a:solidFill>
+                  <a:srgbClr val="5B6B7A"/>
+                </a:solidFill>
+              </a:rPr>
+              <a:t>Same moment (t = 20.5 s): PPO has mapped 48.3 m², the heuristic 43.1 m²</a:t>
             </a:r>
             <a:endParaRPr lang="en-US" sz="1300" dirty="0"/>
           </a:p>
-          <a:p>
-            <a:pPr indent="0" marL="0">
-              <a:buNone/>
-            </a:pPr>
-            <a:r>
-              <a:rPr lang="en-US" sz="1300" dirty="0">
-                <a:solidFill>
-                  <a:schemeClr val="tx1"/>
-                </a:solidFill>
-                <a:latin typeface="Courier New" pitchFamily="34" charset="0"/>
-                <a:ea typeface="Courier New" pitchFamily="34" charset="-122"/>
-                <a:cs typeface="Courier New" pitchFamily="34" charset="-120"/>
-              </a:rPr>
-              <a:t>  multi_robot_exploration/ launch/ config/</a:t>
-            </a:r>
-            <a:endParaRPr lang="en-US" sz="1300" dirty="0"/>
-          </a:p>
-          <a:p>
-            <a:pPr indent="0" marL="0">
-              <a:buNone/>
-            </a:pPr>
-            <a:r>
-              <a:rPr lang="en-US" sz="1300" dirty="0">
-                <a:solidFill>
-                  <a:schemeClr val="tx1"/>
-                </a:solidFill>
-                <a:latin typeface="Courier New" pitchFamily="34" charset="0"/>
-                <a:ea typeface="Courier New" pitchFamily="34" charset="-122"/>
-                <a:cs typeface="Courier New" pitchFamily="34" charset="-120"/>
-              </a:rPr>
-              <a:t>      ROS 2 package</a:t>
-            </a:r>
-            <a:endParaRPr lang="en-US" sz="1300" dirty="0"/>
-          </a:p>
-          <a:p>
-            <a:pPr indent="0" marL="0">
-              <a:buNone/>
-            </a:pPr>
-            <a:r>
-              <a:rPr lang="en-US" sz="1300" dirty="0">
-                <a:solidFill>
-                  <a:schemeClr val="tx1"/>
-                </a:solidFill>
-                <a:latin typeface="Courier New" pitchFamily="34" charset="0"/>
-                <a:ea typeface="Courier New" pitchFamily="34" charset="-122"/>
-                <a:cs typeface="Courier New" pitchFamily="34" charset="-120"/>
-              </a:rPr>
-              <a:t>  rl_sim/   simulator, training, policy node</a:t>
-            </a:r>
-            <a:endParaRPr lang="en-US" sz="1300" dirty="0"/>
-          </a:p>
-          <a:p>
-            <a:pPr indent="0" marL="0">
-              <a:buNone/>
-            </a:pPr>
-            <a:r>
-              <a:rPr lang="en-US" sz="1300" dirty="0">
-                <a:solidFill>
-                  <a:schemeClr val="tx1"/>
-                </a:solidFill>
-                <a:latin typeface="Courier New" pitchFamily="34" charset="0"/>
-                <a:ea typeface="Courier New" pitchFamily="34" charset="-122"/>
-                <a:cs typeface="Courier New" pitchFamily="34" charset="-120"/>
-              </a:rPr>
-              <a:t>  models/ results/ graphs/ docs/ media/</a:t>
-            </a:r>
-            <a:endParaRPr lang="en-US" sz="1300" dirty="0"/>
-          </a:p>
-          <a:p>
-            <a:pPr indent="0" marL="0">
-              <a:buNone/>
-            </a:pPr>
-            <a:r>
-              <a:rPr lang="en-US" sz="1300" dirty="0">
-                <a:solidFill>
-                  <a:schemeClr val="tx1"/>
-                </a:solidFill>
-                <a:latin typeface="Courier New" pitchFamily="34" charset="0"/>
-                <a:ea typeface="Courier New" pitchFamily="34" charset="-122"/>
-                <a:cs typeface="Courier New" pitchFamily="34" charset="-120"/>
-              </a:rPr>
-              <a:t>  presentation/</a:t>
-            </a:r>
-            <a:endParaRPr lang="en-US" sz="1300" dirty="0"/>
-          </a:p>
-          <a:p>
-            <a:pPr indent="0" marL="0">
-              <a:buNone/>
-            </a:pPr>
-            <a:r>
-              <a:rPr lang="en-US" sz="1300" b="1" dirty="0">
-                <a:solidFill>
-                  <a:schemeClr val="tx1"/>
-                </a:solidFill>
-                <a:latin typeface="Courier New" pitchFamily="34" charset="0"/>
-                <a:ea typeface="Courier New" pitchFamily="34" charset="-122"/>
-                <a:cs typeface="Courier New" pitchFamily="34" charset="-120"/>
-              </a:rPr>
-              <a:t>resource-guide/   foundational material</a:t>
-            </a:r>
-            <a:endParaRPr lang="en-US" sz="1300" dirty="0"/>
-          </a:p>
-        </p:txBody>
-      </p:sp>
-      <p:sp>
-        <p:nvSpPr>
-          <p:cNvPr id="4" name="Shape 2"/>
-          <p:cNvSpPr/>
-          <p:nvPr/>
-        </p:nvSpPr>
-        <p:spPr>
-          <a:xfrm>
-            <a:off x="6583680" y="1371600"/>
-            <a:ext cx="5029200" cy="2194560"/>
-          </a:xfrm>
-          <a:prstGeom prst="roundRect">
-            <a:avLst>
-              <a:gd name="adj" fmla="val 5000"/>
-            </a:avLst>
-          </a:prstGeom>
-          <a:solidFill>
-            <a:srgbClr val="EEF3F7"/>
-          </a:solidFill>
-          <a:ln w="12700">
-            <a:solidFill>
-              <a:srgbClr val="EEF3F7"/>
-            </a:solidFill>
-            <a:prstDash val="solid"/>
-          </a:ln>
-        </p:spPr>
-      </p:sp>
-      <p:sp>
-        <p:nvSpPr>
-          <p:cNvPr id="5" name="Shape 3"/>
-          <p:cNvSpPr/>
-          <p:nvPr/>
-        </p:nvSpPr>
-        <p:spPr>
-          <a:xfrm>
-            <a:off x="6812280" y="1627632"/>
-            <a:ext cx="384048" cy="384048"/>
-          </a:xfrm>
-          <a:prstGeom prst="ellipse">
-            <a:avLst/>
-          </a:prstGeom>
-          <a:solidFill>
-            <a:srgbClr val="D62728"/>
-          </a:solidFill>
-          <a:ln w="12700">
-            <a:solidFill>
-              <a:srgbClr val="D62728"/>
-            </a:solidFill>
-            <a:prstDash val="solid"/>
-          </a:ln>
-        </p:spPr>
-      </p:sp>
-      <p:sp>
-        <p:nvSpPr>
-          <p:cNvPr id="6" name="Text 4"/>
+        </p:txBody>
+      </p:sp>
+      <p:sp>
+        <p:nvSpPr>
+          <p:cNvPr id="5" name="Text 2"/>
           <p:cNvSpPr txBox="1"/>
           <p:nvPr/>
         </p:nvSpPr>
         <p:spPr>
           <a:xfrm>
-            <a:off x="7315200" y="1554480"/>
-            <a:ext cx="4114800" cy="548640"/>
-          </a:xfrm>
-          <a:prstGeom prst="rect">
-            <a:avLst/>
-          </a:prstGeom>
-          <a:noFill/>
-          <a:ln/>
-        </p:spPr>
-        <p:txBody>
-          <a:bodyPr wrap="square" lIns="0" tIns="0" rIns="0" bIns="0" rtlCol="0" anchor="ctr"/>
-          <a:lstStyle/>
-          <a:p>
-            <a:pPr indent="0" marL="0">
-              <a:buNone/>
-            </a:pPr>
-            <a:r>
-              <a:rPr lang="en-US" sz="1800" b="1" dirty="0">
-                <a:solidFill>
-                  <a:schemeClr val="tx2"/>
-                </a:solidFill>
-              </a:rPr>
-              <a:t>Heuristic mode</a:t>
-            </a:r>
-            <a:endParaRPr lang="en-US" sz="1800" dirty="0"/>
-          </a:p>
-        </p:txBody>
-      </p:sp>
-      <p:sp>
-        <p:nvSpPr>
-          <p:cNvPr id="7" name="Text 5"/>
-          <p:cNvSpPr txBox="1"/>
-          <p:nvPr/>
-        </p:nvSpPr>
-        <p:spPr>
-          <a:xfrm>
-            <a:off x="6858000" y="2240280"/>
-            <a:ext cx="4526280" cy="1188720"/>
-          </a:xfrm>
-          <a:prstGeom prst="rect">
-            <a:avLst/>
-          </a:prstGeom>
-          <a:noFill/>
-          <a:ln/>
-        </p:spPr>
-        <p:txBody>
-          <a:bodyPr wrap="square" lIns="0" tIns="0" rIns="0" bIns="0" rtlCol="0" anchor="t"/>
-          <a:lstStyle/>
-          <a:p>
-            <a:pPr indent="0" marL="0">
-              <a:buNone/>
-            </a:pPr>
-            <a:r>
-              <a:rPr lang="en-US" sz="1400" dirty="0">
-                <a:solidFill>
-                  <a:schemeClr val="tx1"/>
-                </a:solidFill>
-              </a:rPr>
-              <a:t>Terminals 1–4: spawn, SLAM, map merge, Nav2.</a:t>
-            </a:r>
-            <a:endParaRPr lang="en-US" sz="1400" dirty="0"/>
-          </a:p>
-          <a:p>
-            <a:pPr indent="0" marL="0">
-              <a:buNone/>
-            </a:pPr>
-            <a:r>
-              <a:rPr lang="en-US" sz="1400" dirty="0">
-                <a:solidFill>
-                  <a:schemeClr val="tx1"/>
-                </a:solidFill>
-              </a:rPr>
-              <a:t>Terminal 5: ros2 launch multi_robot_exploration frontier_exploration.launch.py</a:t>
-            </a:r>
-            <a:endParaRPr lang="en-US" sz="1400" dirty="0"/>
-          </a:p>
-        </p:txBody>
-      </p:sp>
-      <p:sp>
-        <p:nvSpPr>
-          <p:cNvPr id="8" name="Shape 6"/>
-          <p:cNvSpPr/>
-          <p:nvPr/>
-        </p:nvSpPr>
-        <p:spPr>
-          <a:xfrm>
-            <a:off x="6583680" y="3840480"/>
-            <a:ext cx="5029200" cy="2377440"/>
-          </a:xfrm>
-          <a:prstGeom prst="roundRect">
-            <a:avLst>
-              <a:gd name="adj" fmla="val 4615"/>
-            </a:avLst>
-          </a:prstGeom>
-          <a:solidFill>
-            <a:srgbClr val="EEF3F7"/>
-          </a:solidFill>
-          <a:ln w="12700">
-            <a:solidFill>
-              <a:srgbClr val="EEF3F7"/>
-            </a:solidFill>
-            <a:prstDash val="solid"/>
-          </a:ln>
-        </p:spPr>
-      </p:sp>
-      <p:sp>
-        <p:nvSpPr>
-          <p:cNvPr id="9" name="Shape 7"/>
-          <p:cNvSpPr/>
-          <p:nvPr/>
-        </p:nvSpPr>
-        <p:spPr>
-          <a:xfrm>
-            <a:off x="6812280" y="4096512"/>
-            <a:ext cx="384048" cy="384048"/>
-          </a:xfrm>
-          <a:prstGeom prst="ellipse">
-            <a:avLst/>
-          </a:prstGeom>
-          <a:solidFill>
-            <a:srgbClr val="1F77B4"/>
-          </a:solidFill>
-          <a:ln w="12700">
-            <a:solidFill>
-              <a:srgbClr val="1F77B4"/>
-            </a:solidFill>
-            <a:prstDash val="solid"/>
-          </a:ln>
-        </p:spPr>
-      </p:sp>
-      <p:sp>
-        <p:nvSpPr>
-          <p:cNvPr id="10" name="Text 8"/>
-          <p:cNvSpPr txBox="1"/>
-          <p:nvPr/>
-        </p:nvSpPr>
-        <p:spPr>
-          <a:xfrm>
-            <a:off x="7315200" y="4023360"/>
-            <a:ext cx="4114800" cy="548640"/>
-          </a:xfrm>
-          <a:prstGeom prst="rect">
-            <a:avLst/>
-          </a:prstGeom>
-          <a:noFill/>
-          <a:ln/>
-        </p:spPr>
-        <p:txBody>
-          <a:bodyPr wrap="square" lIns="0" tIns="0" rIns="0" bIns="0" rtlCol="0" anchor="ctr"/>
-          <a:lstStyle/>
-          <a:p>
-            <a:pPr indent="0" marL="0">
-              <a:buNone/>
-            </a:pPr>
-            <a:r>
-              <a:rPr lang="en-US" sz="1800" b="1" dirty="0">
-                <a:solidFill>
-                  <a:schemeClr val="tx2"/>
-                </a:solidFill>
-              </a:rPr>
-              <a:t>RL mode</a:t>
-            </a:r>
-            <a:endParaRPr lang="en-US" sz="1800" dirty="0"/>
-          </a:p>
-        </p:txBody>
-      </p:sp>
-      <p:sp>
-        <p:nvSpPr>
-          <p:cNvPr id="11" name="Text 9"/>
-          <p:cNvSpPr txBox="1"/>
-          <p:nvPr/>
-        </p:nvSpPr>
-        <p:spPr>
-          <a:xfrm>
-            <a:off x="6858000" y="4709160"/>
-            <a:ext cx="4526280" cy="1371600"/>
-          </a:xfrm>
-          <a:prstGeom prst="rect">
-            <a:avLst/>
-          </a:prstGeom>
-          <a:noFill/>
-          <a:ln/>
-        </p:spPr>
-        <p:txBody>
-          <a:bodyPr wrap="square" lIns="0" tIns="0" rIns="0" bIns="0" rtlCol="0" anchor="t"/>
-          <a:lstStyle/>
-          <a:p>
-            <a:pPr indent="0" marL="0">
-              <a:buNone/>
-            </a:pPr>
-            <a:r>
-              <a:rPr lang="en-US" sz="1400" dirty="0">
-                <a:solidFill>
-                  <a:schemeClr val="tx1"/>
-                </a:solidFill>
-              </a:rPr>
-              <a:t>Terminal 1 on the benchmark arena (GAZEBO_WORLD_SEED=42).</a:t>
-            </a:r>
-            <a:endParaRPr lang="en-US" sz="1400" dirty="0"/>
-          </a:p>
-          <a:p>
-            <a:pPr indent="0" marL="0">
-              <a:buNone/>
-            </a:pPr>
-            <a:r>
-              <a:rPr lang="en-US" sz="1400" dirty="0">
-                <a:solidFill>
-                  <a:schemeClr val="tx1"/>
-                </a:solidFill>
-              </a:rPr>
-              <a:t>Terminal 5: python3 rl_sim/ros_policy_node.py --model models/ppo_frontier_policy.zip</a:t>
-            </a:r>
-            <a:endParaRPr lang="en-US" sz="1400" dirty="0"/>
-          </a:p>
-        </p:txBody>
-      </p:sp>
-      <p:sp>
-        <p:nvSpPr>
-          <p:cNvPr id="12" name="Text 10"/>
-          <p:cNvSpPr txBox="1"/>
-          <p:nvPr/>
-        </p:nvSpPr>
-        <p:spPr>
-          <a:xfrm>
-            <a:off x="548640" y="4023360"/>
-            <a:ext cx="5760720" cy="2194560"/>
+            <a:off x="7589520" y="1371600"/>
+            <a:ext cx="4206240" cy="4846320"/>
           </a:xfrm>
           <a:prstGeom prst="rect">
             <a:avLst/>
@@ -5872,7 +5942,7 @@
                   <a:schemeClr val="tx1"/>
                 </a:solidFill>
               </a:rPr>
-              <a:t>Headless benchmark: rl_sim/gazebo_test.sh</a:t>
+              <a:t>sim2d_ppo_vs_heuristic: side-by-side main result</a:t>
             </a:r>
             <a:endParaRPr lang="en-US" sz="1500" dirty="0"/>
           </a:p>
@@ -5890,7 +5960,7 @@
                   <a:schemeClr val="tx1"/>
                 </a:solidFill>
               </a:rPr>
-              <a:t>Train: python3 rl_sim/train.py (~25 min)</a:t>
+              <a:t>sim2d_ppo: the learned policy alone</a:t>
             </a:r>
             <a:endParaRPr lang="en-US" sz="1500" dirty="0"/>
           </a:p>
@@ -5908,7 +5978,43 @@
                   <a:schemeClr val="tx1"/>
                 </a:solidFill>
               </a:rPr>
-              <a:t>Stats and charts: analyze_gazebo_tests.py, make_graphs.py</a:t>
+              <a:t>sim2d_heuristic: the hand-designed coordinator rule</a:t>
+            </a:r>
+            <a:endParaRPr lang="en-US" sz="1500" dirty="0"/>
+          </a:p>
+          <a:p>
+            <a:pPr marL="342900" indent="-342900">
+              <a:spcAft>
+                <a:spcPts val="800"/>
+              </a:spcAft>
+              <a:buSzPct val="100000"/>
+              <a:buChar char="•"/>
+            </a:pPr>
+            <a:r>
+              <a:rPr lang="en-US" sz="1500" dirty="0">
+                <a:solidFill>
+                  <a:schemeClr val="tx1"/>
+                </a:solidFill>
+              </a:rPr>
+              <a:t>sim2d_nearest, sim2d_random: baselines</a:t>
+            </a:r>
+            <a:endParaRPr lang="en-US" sz="1500" dirty="0"/>
+          </a:p>
+          <a:p>
+            <a:pPr marL="342900" indent="-342900">
+              <a:spcAft>
+                <a:spcPts val="800"/>
+              </a:spcAft>
+              <a:buSzPct val="100000"/>
+              <a:buChar char="•"/>
+            </a:pPr>
+            <a:r>
+              <a:rPr lang="en-US" sz="1500" dirty="0">
+                <a:solidFill>
+                  <a:schemeClr val="tx1"/>
+                </a:solidFill>
+              </a:rPr>
+              <a:t>All in final-product/media/demo-videos, with descriptions</a:t>
             </a:r>
             <a:endParaRPr lang="en-US" sz="1500" dirty="0"/>
           </a:p>
@@ -5987,6 +6093,612 @@
       <p:sp>
         <p:nvSpPr>
           <p:cNvPr id="2" name="Text 0"/>
+          <p:cNvSpPr/>
+          <p:nvPr>
+            <p:ph idx="100" type="title" hasCustomPrompt="1"/>
+          </p:nvPr>
+        </p:nvSpPr>
+        <p:spPr>
+          <a:xfrm>
+            <a:off x="548640" y="320040"/>
+            <a:ext cx="11064240" cy="822960"/>
+          </a:xfrm>
+          <a:prstGeom prst="rect">
+            <a:avLst/>
+          </a:prstGeom>
+          <a:noFill/>
+          <a:ln/>
+        </p:spPr>
+        <p:txBody>
+          <a:bodyPr wrap="square" lIns="0" tIns="0" rIns="0" bIns="0" rtlCol="0"/>
+          <a:lstStyle/>
+          <a:p>
+            <a:pPr indent="0" marL="0">
+              <a:buNone/>
+            </a:pPr>
+            <a:r>
+              <a:rPr lang="en-US" sz="3200" b="1" dirty="0">
+                <a:solidFill>
+                  <a:schemeClr val="tx2"/>
+                </a:solidFill>
+                <a:latin typeface="Cambria" pitchFamily="34" charset="0"/>
+                <a:ea typeface="Cambria" pitchFamily="34" charset="-122"/>
+                <a:cs typeface="Cambria" pitchFamily="34" charset="-120"/>
+              </a:rPr>
+              <a:t>Repository and how to run</a:t>
+            </a:r>
+            <a:endParaRPr lang="en-US" sz="3200" dirty="0"/>
+          </a:p>
+        </p:txBody>
+      </p:sp>
+      <p:sp>
+        <p:nvSpPr>
+          <p:cNvPr id="3" name="Text 1"/>
+          <p:cNvSpPr txBox="1"/>
+          <p:nvPr/>
+        </p:nvSpPr>
+        <p:spPr>
+          <a:xfrm>
+            <a:off x="548640" y="1371600"/>
+            <a:ext cx="5760720" cy="2377440"/>
+          </a:xfrm>
+          <a:prstGeom prst="rect">
+            <a:avLst/>
+          </a:prstGeom>
+          <a:solidFill>
+            <a:srgbClr val="EEF3F7"/>
+          </a:solidFill>
+          <a:ln/>
+        </p:spPr>
+        <p:txBody>
+          <a:bodyPr wrap="square" lIns="152400" tIns="152400" rIns="152400" bIns="152400" rtlCol="0" anchor="t"/>
+          <a:lstStyle/>
+          <a:p>
+            <a:pPr indent="0" marL="0">
+              <a:buNone/>
+            </a:pPr>
+            <a:r>
+              <a:rPr lang="en-US" sz="1300" b="1" dirty="0">
+                <a:solidFill>
+                  <a:schemeClr val="tx1"/>
+                </a:solidFill>
+                <a:latin typeface="Courier New" pitchFamily="34" charset="0"/>
+                <a:ea typeface="Courier New" pitchFamily="34" charset="-122"/>
+                <a:cs typeface="Courier New" pitchFamily="34" charset="-120"/>
+              </a:rPr>
+              <a:t>final-product/</a:t>
+            </a:r>
+            <a:endParaRPr lang="en-US" sz="1300" dirty="0"/>
+          </a:p>
+          <a:p>
+            <a:pPr indent="0" marL="0">
+              <a:buNone/>
+            </a:pPr>
+            <a:r>
+              <a:rPr lang="en-US" sz="1300" dirty="0">
+                <a:solidFill>
+                  <a:schemeClr val="tx1"/>
+                </a:solidFill>
+                <a:latin typeface="Courier New" pitchFamily="34" charset="0"/>
+                <a:ea typeface="Courier New" pitchFamily="34" charset="-122"/>
+                <a:cs typeface="Courier New" pitchFamily="34" charset="-120"/>
+              </a:rPr>
+              <a:t>  multi_robot_exploration/ launch/ config/</a:t>
+            </a:r>
+            <a:endParaRPr lang="en-US" sz="1300" dirty="0"/>
+          </a:p>
+          <a:p>
+            <a:pPr indent="0" marL="0">
+              <a:buNone/>
+            </a:pPr>
+            <a:r>
+              <a:rPr lang="en-US" sz="1300" dirty="0">
+                <a:solidFill>
+                  <a:schemeClr val="tx1"/>
+                </a:solidFill>
+                <a:latin typeface="Courier New" pitchFamily="34" charset="0"/>
+                <a:ea typeface="Courier New" pitchFamily="34" charset="-122"/>
+                <a:cs typeface="Courier New" pitchFamily="34" charset="-120"/>
+              </a:rPr>
+              <a:t>      ROS 2 package</a:t>
+            </a:r>
+            <a:endParaRPr lang="en-US" sz="1300" dirty="0"/>
+          </a:p>
+          <a:p>
+            <a:pPr indent="0" marL="0">
+              <a:buNone/>
+            </a:pPr>
+            <a:r>
+              <a:rPr lang="en-US" sz="1300" dirty="0">
+                <a:solidFill>
+                  <a:schemeClr val="tx1"/>
+                </a:solidFill>
+                <a:latin typeface="Courier New" pitchFamily="34" charset="0"/>
+                <a:ea typeface="Courier New" pitchFamily="34" charset="-122"/>
+                <a:cs typeface="Courier New" pitchFamily="34" charset="-120"/>
+              </a:rPr>
+              <a:t>  rl_sim/   simulator, training, policy node</a:t>
+            </a:r>
+            <a:endParaRPr lang="en-US" sz="1300" dirty="0"/>
+          </a:p>
+          <a:p>
+            <a:pPr indent="0" marL="0">
+              <a:buNone/>
+            </a:pPr>
+            <a:r>
+              <a:rPr lang="en-US" sz="1300" dirty="0">
+                <a:solidFill>
+                  <a:schemeClr val="tx1"/>
+                </a:solidFill>
+                <a:latin typeface="Courier New" pitchFamily="34" charset="0"/>
+                <a:ea typeface="Courier New" pitchFamily="34" charset="-122"/>
+                <a:cs typeface="Courier New" pitchFamily="34" charset="-120"/>
+              </a:rPr>
+              <a:t>  models/ results/ graphs/ docs/ media/</a:t>
+            </a:r>
+            <a:endParaRPr lang="en-US" sz="1300" dirty="0"/>
+          </a:p>
+          <a:p>
+            <a:pPr indent="0" marL="0">
+              <a:buNone/>
+            </a:pPr>
+            <a:r>
+              <a:rPr lang="en-US" sz="1300" dirty="0">
+                <a:solidFill>
+                  <a:schemeClr val="tx1"/>
+                </a:solidFill>
+                <a:latin typeface="Courier New" pitchFamily="34" charset="0"/>
+                <a:ea typeface="Courier New" pitchFamily="34" charset="-122"/>
+                <a:cs typeface="Courier New" pitchFamily="34" charset="-120"/>
+              </a:rPr>
+              <a:t>  presentation/</a:t>
+            </a:r>
+            <a:endParaRPr lang="en-US" sz="1300" dirty="0"/>
+          </a:p>
+          <a:p>
+            <a:pPr indent="0" marL="0">
+              <a:buNone/>
+            </a:pPr>
+            <a:r>
+              <a:rPr lang="en-US" sz="1300" b="1" dirty="0">
+                <a:solidFill>
+                  <a:schemeClr val="tx1"/>
+                </a:solidFill>
+                <a:latin typeface="Courier New" pitchFamily="34" charset="0"/>
+                <a:ea typeface="Courier New" pitchFamily="34" charset="-122"/>
+                <a:cs typeface="Courier New" pitchFamily="34" charset="-120"/>
+              </a:rPr>
+              <a:t>resource-guide/   foundational material</a:t>
+            </a:r>
+            <a:endParaRPr lang="en-US" sz="1300" dirty="0"/>
+          </a:p>
+        </p:txBody>
+      </p:sp>
+      <p:sp>
+        <p:nvSpPr>
+          <p:cNvPr id="4" name="Shape 2"/>
+          <p:cNvSpPr/>
+          <p:nvPr/>
+        </p:nvSpPr>
+        <p:spPr>
+          <a:xfrm>
+            <a:off x="6583680" y="1371600"/>
+            <a:ext cx="5029200" cy="2194560"/>
+          </a:xfrm>
+          <a:prstGeom prst="roundRect">
+            <a:avLst>
+              <a:gd name="adj" fmla="val 5000"/>
+            </a:avLst>
+          </a:prstGeom>
+          <a:solidFill>
+            <a:srgbClr val="EEF3F7"/>
+          </a:solidFill>
+          <a:ln w="12700">
+            <a:solidFill>
+              <a:srgbClr val="EEF3F7"/>
+            </a:solidFill>
+            <a:prstDash val="solid"/>
+          </a:ln>
+        </p:spPr>
+      </p:sp>
+      <p:sp>
+        <p:nvSpPr>
+          <p:cNvPr id="5" name="Shape 3"/>
+          <p:cNvSpPr/>
+          <p:nvPr/>
+        </p:nvSpPr>
+        <p:spPr>
+          <a:xfrm>
+            <a:off x="6812280" y="1627632"/>
+            <a:ext cx="384048" cy="384048"/>
+          </a:xfrm>
+          <a:prstGeom prst="ellipse">
+            <a:avLst/>
+          </a:prstGeom>
+          <a:solidFill>
+            <a:srgbClr val="D62728"/>
+          </a:solidFill>
+          <a:ln w="12700">
+            <a:solidFill>
+              <a:srgbClr val="D62728"/>
+            </a:solidFill>
+            <a:prstDash val="solid"/>
+          </a:ln>
+        </p:spPr>
+      </p:sp>
+      <p:sp>
+        <p:nvSpPr>
+          <p:cNvPr id="6" name="Text 4"/>
+          <p:cNvSpPr txBox="1"/>
+          <p:nvPr/>
+        </p:nvSpPr>
+        <p:spPr>
+          <a:xfrm>
+            <a:off x="7315200" y="1554480"/>
+            <a:ext cx="4114800" cy="548640"/>
+          </a:xfrm>
+          <a:prstGeom prst="rect">
+            <a:avLst/>
+          </a:prstGeom>
+          <a:noFill/>
+          <a:ln/>
+        </p:spPr>
+        <p:txBody>
+          <a:bodyPr wrap="square" lIns="0" tIns="0" rIns="0" bIns="0" rtlCol="0" anchor="ctr"/>
+          <a:lstStyle/>
+          <a:p>
+            <a:pPr indent="0" marL="0">
+              <a:buNone/>
+            </a:pPr>
+            <a:r>
+              <a:rPr lang="en-US" sz="1800" b="1" dirty="0">
+                <a:solidFill>
+                  <a:schemeClr val="tx2"/>
+                </a:solidFill>
+              </a:rPr>
+              <a:t>Heuristic mode</a:t>
+            </a:r>
+            <a:endParaRPr lang="en-US" sz="1800" dirty="0"/>
+          </a:p>
+        </p:txBody>
+      </p:sp>
+      <p:sp>
+        <p:nvSpPr>
+          <p:cNvPr id="7" name="Text 5"/>
+          <p:cNvSpPr txBox="1"/>
+          <p:nvPr/>
+        </p:nvSpPr>
+        <p:spPr>
+          <a:xfrm>
+            <a:off x="6858000" y="2240280"/>
+            <a:ext cx="4526280" cy="1188720"/>
+          </a:xfrm>
+          <a:prstGeom prst="rect">
+            <a:avLst/>
+          </a:prstGeom>
+          <a:noFill/>
+          <a:ln/>
+        </p:spPr>
+        <p:txBody>
+          <a:bodyPr wrap="square" lIns="0" tIns="0" rIns="0" bIns="0" rtlCol="0" anchor="t"/>
+          <a:lstStyle/>
+          <a:p>
+            <a:pPr indent="0" marL="0">
+              <a:buNone/>
+            </a:pPr>
+            <a:r>
+              <a:rPr lang="en-US" sz="1400" dirty="0">
+                <a:solidFill>
+                  <a:schemeClr val="tx1"/>
+                </a:solidFill>
+              </a:rPr>
+              <a:t>Terminals 1–4: spawn, SLAM, map merge, Nav2.</a:t>
+            </a:r>
+            <a:endParaRPr lang="en-US" sz="1400" dirty="0"/>
+          </a:p>
+          <a:p>
+            <a:pPr indent="0" marL="0">
+              <a:buNone/>
+            </a:pPr>
+            <a:r>
+              <a:rPr lang="en-US" sz="1400" dirty="0">
+                <a:solidFill>
+                  <a:schemeClr val="tx1"/>
+                </a:solidFill>
+              </a:rPr>
+              <a:t>Terminal 5: ros2 launch multi_robot_exploration frontier_exploration.launch.py</a:t>
+            </a:r>
+            <a:endParaRPr lang="en-US" sz="1400" dirty="0"/>
+          </a:p>
+        </p:txBody>
+      </p:sp>
+      <p:sp>
+        <p:nvSpPr>
+          <p:cNvPr id="8" name="Shape 6"/>
+          <p:cNvSpPr/>
+          <p:nvPr/>
+        </p:nvSpPr>
+        <p:spPr>
+          <a:xfrm>
+            <a:off x="6583680" y="3840480"/>
+            <a:ext cx="5029200" cy="2377440"/>
+          </a:xfrm>
+          <a:prstGeom prst="roundRect">
+            <a:avLst>
+              <a:gd name="adj" fmla="val 4615"/>
+            </a:avLst>
+          </a:prstGeom>
+          <a:solidFill>
+            <a:srgbClr val="EEF3F7"/>
+          </a:solidFill>
+          <a:ln w="12700">
+            <a:solidFill>
+              <a:srgbClr val="EEF3F7"/>
+            </a:solidFill>
+            <a:prstDash val="solid"/>
+          </a:ln>
+        </p:spPr>
+      </p:sp>
+      <p:sp>
+        <p:nvSpPr>
+          <p:cNvPr id="9" name="Shape 7"/>
+          <p:cNvSpPr/>
+          <p:nvPr/>
+        </p:nvSpPr>
+        <p:spPr>
+          <a:xfrm>
+            <a:off x="6812280" y="4096512"/>
+            <a:ext cx="384048" cy="384048"/>
+          </a:xfrm>
+          <a:prstGeom prst="ellipse">
+            <a:avLst/>
+          </a:prstGeom>
+          <a:solidFill>
+            <a:srgbClr val="1F77B4"/>
+          </a:solidFill>
+          <a:ln w="12700">
+            <a:solidFill>
+              <a:srgbClr val="1F77B4"/>
+            </a:solidFill>
+            <a:prstDash val="solid"/>
+          </a:ln>
+        </p:spPr>
+      </p:sp>
+      <p:sp>
+        <p:nvSpPr>
+          <p:cNvPr id="10" name="Text 8"/>
+          <p:cNvSpPr txBox="1"/>
+          <p:nvPr/>
+        </p:nvSpPr>
+        <p:spPr>
+          <a:xfrm>
+            <a:off x="7315200" y="4023360"/>
+            <a:ext cx="4114800" cy="548640"/>
+          </a:xfrm>
+          <a:prstGeom prst="rect">
+            <a:avLst/>
+          </a:prstGeom>
+          <a:noFill/>
+          <a:ln/>
+        </p:spPr>
+        <p:txBody>
+          <a:bodyPr wrap="square" lIns="0" tIns="0" rIns="0" bIns="0" rtlCol="0" anchor="ctr"/>
+          <a:lstStyle/>
+          <a:p>
+            <a:pPr indent="0" marL="0">
+              <a:buNone/>
+            </a:pPr>
+            <a:r>
+              <a:rPr lang="en-US" sz="1800" b="1" dirty="0">
+                <a:solidFill>
+                  <a:schemeClr val="tx2"/>
+                </a:solidFill>
+              </a:rPr>
+              <a:t>RL mode</a:t>
+            </a:r>
+            <a:endParaRPr lang="en-US" sz="1800" dirty="0"/>
+          </a:p>
+        </p:txBody>
+      </p:sp>
+      <p:sp>
+        <p:nvSpPr>
+          <p:cNvPr id="11" name="Text 9"/>
+          <p:cNvSpPr txBox="1"/>
+          <p:nvPr/>
+        </p:nvSpPr>
+        <p:spPr>
+          <a:xfrm>
+            <a:off x="6858000" y="4709160"/>
+            <a:ext cx="4526280" cy="1371600"/>
+          </a:xfrm>
+          <a:prstGeom prst="rect">
+            <a:avLst/>
+          </a:prstGeom>
+          <a:noFill/>
+          <a:ln/>
+        </p:spPr>
+        <p:txBody>
+          <a:bodyPr wrap="square" lIns="0" tIns="0" rIns="0" bIns="0" rtlCol="0" anchor="t"/>
+          <a:lstStyle/>
+          <a:p>
+            <a:pPr indent="0" marL="0">
+              <a:buNone/>
+            </a:pPr>
+            <a:r>
+              <a:rPr lang="en-US" sz="1400" dirty="0">
+                <a:solidFill>
+                  <a:schemeClr val="tx1"/>
+                </a:solidFill>
+              </a:rPr>
+              <a:t>Terminal 1 on the benchmark arena (GAZEBO_WORLD_SEED=42).</a:t>
+            </a:r>
+            <a:endParaRPr lang="en-US" sz="1400" dirty="0"/>
+          </a:p>
+          <a:p>
+            <a:pPr indent="0" marL="0">
+              <a:buNone/>
+            </a:pPr>
+            <a:r>
+              <a:rPr lang="en-US" sz="1400" dirty="0">
+                <a:solidFill>
+                  <a:schemeClr val="tx1"/>
+                </a:solidFill>
+              </a:rPr>
+              <a:t>Terminal 5: python3 rl_sim/ros_policy_node.py --model models/ppo_frontier_policy.zip</a:t>
+            </a:r>
+            <a:endParaRPr lang="en-US" sz="1400" dirty="0"/>
+          </a:p>
+        </p:txBody>
+      </p:sp>
+      <p:sp>
+        <p:nvSpPr>
+          <p:cNvPr id="12" name="Text 10"/>
+          <p:cNvSpPr txBox="1"/>
+          <p:nvPr/>
+        </p:nvSpPr>
+        <p:spPr>
+          <a:xfrm>
+            <a:off x="548640" y="4023360"/>
+            <a:ext cx="5760720" cy="2194560"/>
+          </a:xfrm>
+          <a:prstGeom prst="rect">
+            <a:avLst/>
+          </a:prstGeom>
+          <a:noFill/>
+          <a:ln/>
+        </p:spPr>
+        <p:txBody>
+          <a:bodyPr wrap="square" rtlCol="0" anchor="t"/>
+          <a:lstStyle/>
+          <a:p>
+            <a:pPr marL="342900" indent="-342900">
+              <a:spcAft>
+                <a:spcPts val="800"/>
+              </a:spcAft>
+              <a:buSzPct val="100000"/>
+              <a:buChar char="•"/>
+            </a:pPr>
+            <a:r>
+              <a:rPr lang="en-US" sz="1500" dirty="0">
+                <a:solidFill>
+                  <a:schemeClr val="tx1"/>
+                </a:solidFill>
+              </a:rPr>
+              <a:t>Headless benchmark: rl_sim/gazebo_test.sh</a:t>
+            </a:r>
+            <a:endParaRPr lang="en-US" sz="1500" dirty="0"/>
+          </a:p>
+          <a:p>
+            <a:pPr marL="342900" indent="-342900">
+              <a:spcAft>
+                <a:spcPts val="800"/>
+              </a:spcAft>
+              <a:buSzPct val="100000"/>
+              <a:buChar char="•"/>
+            </a:pPr>
+            <a:r>
+              <a:rPr lang="en-US" sz="1500" dirty="0">
+                <a:solidFill>
+                  <a:schemeClr val="tx1"/>
+                </a:solidFill>
+              </a:rPr>
+              <a:t>Train: python3 rl_sim/train.py (~25 min)</a:t>
+            </a:r>
+            <a:endParaRPr lang="en-US" sz="1500" dirty="0"/>
+          </a:p>
+          <a:p>
+            <a:pPr marL="342900" indent="-342900">
+              <a:spcAft>
+                <a:spcPts val="800"/>
+              </a:spcAft>
+              <a:buSzPct val="100000"/>
+              <a:buChar char="•"/>
+            </a:pPr>
+            <a:r>
+              <a:rPr lang="en-US" sz="1500" dirty="0">
+                <a:solidFill>
+                  <a:schemeClr val="tx1"/>
+                </a:solidFill>
+              </a:rPr>
+              <a:t>Stats and charts: analyze_gazebo_tests.py, make_graphs.py</a:t>
+            </a:r>
+            <a:endParaRPr lang="en-US" sz="1500" dirty="0"/>
+          </a:p>
+        </p:txBody>
+      </p:sp>
+      <p:sp>
+        <p:nvSpPr>
+          <p:cNvPr id="25" name="Slide Number Placeholder 0"/>
+          <p:cNvSpPr>
+            <a:spLocks noGrp="1"/>
+          </p:cNvSpPr>
+          <p:nvPr>
+            <p:ph type="sldNum" sz="quarter" idx="4294967295"/>
+          </p:nvPr>
+        </p:nvSpPr>
+        <p:spPr>
+          <a:xfrm>
+            <a:off x="11338560" y="6400800"/>
+            <a:ext cx="548640" cy="274320"/>
+          </a:xfrm>
+          <a:prstGeom prst="rect">
+            <a:avLst/>
+          </a:prstGeom>
+          <a:extLst>
+            <a:ext uri="{C572A759-6A51-4108-AA02-DFA0A04FC94B}">
+              <ma14:wrappingTextBoxFlag xmlns:ma14="http://schemas.microsoft.com/office/mac/drawingml/2011/main" val="0"/>
+            </a:ext>
+          </a:extLst>
+        </p:spPr>
+        <p:txBody>
+          <a:bodyPr/>
+          <a:lstStyle>
+            <a:lvl1pPr>
+              <a:defRPr sz="1000">
+                <a:solidFill>
+                  <a:srgbClr val="5B6B7A"/>
+                </a:solidFill>
+              </a:defRPr>
+            </a:lvl1pPr>
+          </a:lstStyle>
+          <a:p>
+            <a:pPr algn="l"/>
+            <a:fld id="{F7021451-1387-4CA6-816F-3879F97B5CBC}" type="slidenum">
+              <a:rPr b="0" lang="en-US"/>
+              <a:t>17</a:t>
+            </a:fld>
+            <a:endParaRPr lang="en-US"/>
+          </a:p>
+        </p:txBody>
+      </p:sp>
+    </p:spTree>
+  </p:cSld>
+  <p:clrMapOvr>
+    <a:masterClrMapping/>
+  </p:clrMapOvr>
+</p:sld>
+</file>
+
+<file path=ppt/slides/slide18.xml><?xml version="1.0" encoding="utf-8"?>
+<p:sld xmlns:a="http://schemas.openxmlformats.org/drawingml/2006/main" xmlns:r="http://schemas.openxmlformats.org/officeDocument/2006/relationships" xmlns:p="http://schemas.openxmlformats.org/presentationml/2006/main">
+  <p:cSld name="Slide 18">
+    <p:spTree>
+      <p:nvGrpSpPr>
+        <p:cNvPr id="1" name=""/>
+        <p:cNvGrpSpPr/>
+        <p:nvPr/>
+      </p:nvGrpSpPr>
+      <p:grpSpPr>
+        <a:xfrm>
+          <a:off x="0" y="0"/>
+          <a:ext cx="0" cy="0"/>
+          <a:chOff x="0" y="0"/>
+          <a:chExt cx="0" cy="0"/>
+        </a:xfrm>
+      </p:grpSpPr>
+      <p:sp>
+        <p:nvSpPr>
+          <p:cNvPr id="2" name="Text 0"/>
           <p:cNvSpPr txBox="1"/>
           <p:nvPr/>
         </p:nvSpPr>
@@ -6129,7 +6841,7 @@
                   <a:srgbClr val="FFFFFF"/>
                 </a:solidFill>
               </a:rPr>
-              <a:t>8 paired runs of 240 s; full-coverage time in Gazebo not measured</a:t>
+              <a:t>Final-area gap at 240 s not significant; full coverage not measured</a:t>
             </a:r>
             <a:endParaRPr lang="en-US" sz="1700" dirty="0"/>
           </a:p>
@@ -6632,7 +7344,7 @@
                 <a:ea typeface="Cambria" pitchFamily="34" charset="-122"/>
                 <a:cs typeface="Cambria" pitchFamily="34" charset="-120"/>
               </a:rPr>
-              <a:t>+15 %</a:t>
+              <a:t>−21 %</a:t>
             </a:r>
             <a:endParaRPr lang="en-US" sz="4400" dirty="0"/>
           </a:p>
@@ -6668,7 +7380,7 @@
                   <a:srgbClr val="5B6B7A"/>
                 </a:solidFill>
               </a:rPr>
-              <a:t>more area mapped in 240 s by the RL policy (Gazebo)</a:t>
+              <a:t>time to map 30 m² with the RL policy (Gazebo)</a:t>
             </a:r>
             <a:endParaRPr lang="en-US" sz="1400" dirty="0"/>
           </a:p>
@@ -7601,36 +8313,28 @@
                 <a:ea typeface="Cambria" pitchFamily="34" charset="-122"/>
                 <a:cs typeface="Cambria" pitchFamily="34" charset="-120"/>
               </a:rPr>
-              <a:t>Heuristic brain: frontier_coordinator</a:t>
+              <a:t>Fixing robots stuck next to obstacles</a:t>
             </a:r>
             <a:endParaRPr lang="en-US" sz="3200" dirty="0"/>
           </a:p>
         </p:txBody>
       </p:sp>
-      <p:pic>
-        <p:nvPicPr>
-          <p:cNvPr id="3" name="Image 0" descr="07 coordinator replan">    </p:cNvPr>
-          <p:cNvPicPr>
-            <a:picLocks noChangeAspect="1"/>
-          </p:cNvPicPr>
+      <p:graphicFrame>
+        <p:nvGraphicFramePr>
+          <p:cNvPr id="3" name="Chart 0" descr=""/>
+          <p:cNvGraphicFramePr/>
           <p:nvPr/>
-        </p:nvPicPr>
-        <p:blipFill>
-          <a:blip r:embed="rId1"/>
-          <a:stretch>
-            <a:fillRect/>
-          </a:stretch>
-        </p:blipFill>
-        <p:spPr>
-          <a:xfrm>
-            <a:off x="548640" y="1272228"/>
-            <a:ext cx="7315200" cy="3124824"/>
-          </a:xfrm>
-          <a:prstGeom prst="rect">
-            <a:avLst/>
-          </a:prstGeom>
-        </p:spPr>
-      </p:pic>
+        </p:nvGraphicFramePr>
+        <p:xfrm>
+          <a:off x="457200" y="1280160"/>
+          <a:ext cx="5486400" cy="4937760"/>
+        </p:xfrm>
+        <a:graphic xmlns:a="http://schemas.openxmlformats.org/drawingml/2006/main">
+          <a:graphicData uri="http://schemas.openxmlformats.org/drawingml/2006/chart">
+            <c:chart xmlns:c="http://schemas.openxmlformats.org/drawingml/2006/chart" r:id="rId1"/>
+          </a:graphicData>
+        </a:graphic>
+      </p:graphicFrame>
       <p:sp>
         <p:nvSpPr>
           <p:cNvPr id="4" name="Shape 1"/>
@@ -7639,12 +8343,12 @@
         </p:nvSpPr>
         <p:spPr>
           <a:xfrm>
-            <a:off x="731520" y="4754880"/>
-            <a:ext cx="6949440" cy="1280160"/>
+            <a:off x="6309360" y="1371600"/>
+            <a:ext cx="5394960" cy="2377440"/>
           </a:xfrm>
           <a:prstGeom prst="roundRect">
             <a:avLst>
-              <a:gd name="adj" fmla="val 8571"/>
+              <a:gd name="adj" fmla="val 4615"/>
             </a:avLst>
           </a:prstGeom>
           <a:solidFill>
@@ -7660,39 +8364,28 @@
       </p:sp>
       <p:sp>
         <p:nvSpPr>
-          <p:cNvPr id="5" name="Text 2"/>
-          <p:cNvSpPr txBox="1"/>
+          <p:cNvPr id="5" name="Shape 2"/>
+          <p:cNvSpPr/>
           <p:nvPr/>
         </p:nvSpPr>
         <p:spPr>
           <a:xfrm>
-            <a:off x="914400" y="4846320"/>
-            <a:ext cx="6583680" cy="1097280"/>
-          </a:xfrm>
-          <a:prstGeom prst="rect">
-            <a:avLst/>
-          </a:prstGeom>
-          <a:noFill/>
-          <a:ln/>
-        </p:spPr>
-        <p:txBody>
-          <a:bodyPr wrap="square" rtlCol="0" anchor="ctr"/>
-          <a:lstStyle/>
-          <a:p>
-            <a:pPr indent="0" marL="0">
-              <a:buNone/>
-            </a:pPr>
-            <a:r>
-              <a:rPr lang="en-US" sz="1600" b="1" dirty="0">
-                <a:solidFill>
-                  <a:schemeClr val="tx2"/>
-                </a:solidFill>
-              </a:rPr>
-              <a:t>cost = distance + 50 / d(other robot's goal) + 50 · max(0, metres into other robot's half)</a:t>
-            </a:r>
-            <a:endParaRPr lang="en-US" sz="1600" dirty="0"/>
-          </a:p>
-        </p:txBody>
+            <a:off x="6537960" y="1627632"/>
+            <a:ext cx="384048" cy="384048"/>
+          </a:xfrm>
+          <a:prstGeom prst="ellipse">
+            <a:avLst/>
+          </a:prstGeom>
+          <a:solidFill>
+            <a:srgbClr val="D62728"/>
+          </a:solidFill>
+          <a:ln w="12700">
+            <a:solidFill>
+              <a:srgbClr val="D62728"/>
+            </a:solidFill>
+            <a:prstDash val="solid"/>
+          </a:ln>
+        </p:spPr>
       </p:sp>
       <p:sp>
         <p:nvSpPr>
@@ -7702,8 +8395,8 @@
         </p:nvSpPr>
         <p:spPr>
           <a:xfrm>
-            <a:off x="8138160" y="1371600"/>
-            <a:ext cx="3657600" cy="4846320"/>
+            <a:off x="7040880" y="1554480"/>
+            <a:ext cx="4480560" cy="548640"/>
           </a:xfrm>
           <a:prstGeom prst="rect">
             <a:avLst/>
@@ -7712,79 +8405,181 @@
           <a:ln/>
         </p:spPr>
         <p:txBody>
-          <a:bodyPr wrap="square" rtlCol="0" anchor="t"/>
-          <a:lstStyle/>
-          <a:p>
-            <a:pPr marL="342900" indent="-342900">
-              <a:spcAft>
-                <a:spcPts val="800"/>
-              </a:spcAft>
-              <a:buSzPct val="100000"/>
-              <a:buChar char="•"/>
-            </a:pPr>
-            <a:r>
-              <a:rPr lang="en-US" sz="1500" dirty="0">
+          <a:bodyPr wrap="square" lIns="0" tIns="0" rIns="0" bIns="0" rtlCol="0" anchor="ctr"/>
+          <a:lstStyle/>
+          <a:p>
+            <a:pPr indent="0" marL="0">
+              <a:buNone/>
+            </a:pPr>
+            <a:r>
+              <a:rPr lang="en-US" sz="1800" b="1" dirty="0">
+                <a:solidFill>
+                  <a:schemeClr val="tx2"/>
+                </a:solidFill>
+              </a:rPr>
+              <a:t>Cause: ghost obstacles</a:t>
+            </a:r>
+            <a:endParaRPr lang="en-US" sz="1800" dirty="0"/>
+          </a:p>
+        </p:txBody>
+      </p:sp>
+      <p:sp>
+        <p:nvSpPr>
+          <p:cNvPr id="7" name="Text 4"/>
+          <p:cNvSpPr txBox="1"/>
+          <p:nvPr/>
+        </p:nvSpPr>
+        <p:spPr>
+          <a:xfrm>
+            <a:off x="6583680" y="2240280"/>
+            <a:ext cx="4892040" cy="1371600"/>
+          </a:xfrm>
+          <a:prstGeom prst="rect">
+            <a:avLst/>
+          </a:prstGeom>
+          <a:noFill/>
+          <a:ln/>
+        </p:spPr>
+        <p:txBody>
+          <a:bodyPr wrap="square" lIns="0" tIns="0" rIns="0" bIns="0" rtlCol="0" anchor="t"/>
+          <a:lstStyle/>
+          <a:p>
+            <a:pPr indent="0" marL="0">
+              <a:buNone/>
+            </a:pPr>
+            <a:r>
+              <a:rPr lang="en-US" sz="1400" dirty="0">
                 <a:solidFill>
                   <a:schemeClr val="tx1"/>
                 </a:solidFill>
               </a:rPr>
-              <a:t>Frontiers: morphological detection on /map, clusters &gt; 15 px, merged within 1.5 m</a:t>
-            </a:r>
-            <a:endParaRPr lang="en-US" sz="1500" dirty="0"/>
-          </a:p>
-          <a:p>
-            <a:pPr marL="342900" indent="-342900">
-              <a:spcAft>
-                <a:spcPts val="800"/>
-              </a:spcAft>
-              <a:buSzPct val="100000"/>
-              <a:buChar char="•"/>
-            </a:pPr>
-            <a:r>
-              <a:rPr lang="en-US" sz="1500" dirty="0">
+              <a:t>Each robot's SLAM map marks the other robot as an obstacle. Nav2 loaded that map as a static layer, so a robot driving onto a ghost could never clear it (lidar blind zone &lt; 0.12 m) and stayed stuck.</a:t>
+            </a:r>
+            <a:endParaRPr lang="en-US" sz="1400" dirty="0"/>
+          </a:p>
+        </p:txBody>
+      </p:sp>
+      <p:sp>
+        <p:nvSpPr>
+          <p:cNvPr id="8" name="Shape 5"/>
+          <p:cNvSpPr/>
+          <p:nvPr/>
+        </p:nvSpPr>
+        <p:spPr>
+          <a:xfrm>
+            <a:off x="6309360" y="4023360"/>
+            <a:ext cx="5394960" cy="2286000"/>
+          </a:xfrm>
+          <a:prstGeom prst="roundRect">
+            <a:avLst>
+              <a:gd name="adj" fmla="val 4800"/>
+            </a:avLst>
+          </a:prstGeom>
+          <a:solidFill>
+            <a:srgbClr val="EEF3F7"/>
+          </a:solidFill>
+          <a:ln w="12700">
+            <a:solidFill>
+              <a:srgbClr val="EEF3F7"/>
+            </a:solidFill>
+            <a:prstDash val="solid"/>
+          </a:ln>
+        </p:spPr>
+      </p:sp>
+      <p:sp>
+        <p:nvSpPr>
+          <p:cNvPr id="9" name="Shape 6"/>
+          <p:cNvSpPr/>
+          <p:nvPr/>
+        </p:nvSpPr>
+        <p:spPr>
+          <a:xfrm>
+            <a:off x="6537960" y="4279392"/>
+            <a:ext cx="384048" cy="384048"/>
+          </a:xfrm>
+          <a:prstGeom prst="ellipse">
+            <a:avLst/>
+          </a:prstGeom>
+          <a:solidFill>
+            <a:srgbClr val="0E7C86"/>
+          </a:solidFill>
+          <a:ln w="12700">
+            <a:solidFill>
+              <a:srgbClr val="0E7C86"/>
+            </a:solidFill>
+            <a:prstDash val="solid"/>
+          </a:ln>
+        </p:spPr>
+      </p:sp>
+      <p:sp>
+        <p:nvSpPr>
+          <p:cNvPr id="10" name="Text 7"/>
+          <p:cNvSpPr txBox="1"/>
+          <p:nvPr/>
+        </p:nvSpPr>
+        <p:spPr>
+          <a:xfrm>
+            <a:off x="7040880" y="4206240"/>
+            <a:ext cx="4480560" cy="548640"/>
+          </a:xfrm>
+          <a:prstGeom prst="rect">
+            <a:avLst/>
+          </a:prstGeom>
+          <a:noFill/>
+          <a:ln/>
+        </p:spPr>
+        <p:txBody>
+          <a:bodyPr wrap="square" lIns="0" tIns="0" rIns="0" bIns="0" rtlCol="0" anchor="ctr"/>
+          <a:lstStyle/>
+          <a:p>
+            <a:pPr indent="0" marL="0">
+              <a:buNone/>
+            </a:pPr>
+            <a:r>
+              <a:rPr lang="en-US" sz="1800" b="1" dirty="0">
+                <a:solidFill>
+                  <a:schemeClr val="tx2"/>
+                </a:solidFill>
+              </a:rPr>
+              <a:t>Fix</a:t>
+            </a:r>
+            <a:endParaRPr lang="en-US" sz="1800" dirty="0"/>
+          </a:p>
+        </p:txBody>
+      </p:sp>
+      <p:sp>
+        <p:nvSpPr>
+          <p:cNvPr id="11" name="Text 8"/>
+          <p:cNvSpPr txBox="1"/>
+          <p:nvPr/>
+        </p:nvSpPr>
+        <p:spPr>
+          <a:xfrm>
+            <a:off x="6583680" y="4892040"/>
+            <a:ext cx="4892040" cy="1280160"/>
+          </a:xfrm>
+          <a:prstGeom prst="rect">
+            <a:avLst/>
+          </a:prstGeom>
+          <a:noFill/>
+          <a:ln/>
+        </p:spPr>
+        <p:txBody>
+          <a:bodyPr wrap="square" lIns="0" tIns="0" rIns="0" bIns="0" rtlCol="0" anchor="t"/>
+          <a:lstStyle/>
+          <a:p>
+            <a:pPr indent="0" marL="0">
+              <a:buNone/>
+            </a:pPr>
+            <a:r>
+              <a:rPr lang="en-US" sz="1400" dirty="0">
                 <a:solidFill>
                   <a:schemeClr val="tx1"/>
                 </a:solidFill>
               </a:rPr>
-              <a:t>Replans every 3 s; stuck detection after ~9 s without progress</a:t>
-            </a:r>
-            <a:endParaRPr lang="en-US" sz="1500" dirty="0"/>
-          </a:p>
-          <a:p>
-            <a:pPr marL="342900" indent="-342900">
-              <a:spcAft>
-                <a:spcPts val="800"/>
-              </a:spcAft>
-              <a:buSzPct val="100000"/>
-              <a:buChar char="•"/>
-            </a:pPr>
-            <a:r>
-              <a:rPr lang="en-US" sz="1500" dirty="0">
-                <a:solidFill>
-                  <a:schemeClr val="tx1"/>
-                </a:solidFill>
-              </a:rPr>
-              <a:t>Failed goals blacklisted for 30 s</a:t>
-            </a:r>
-            <a:endParaRPr lang="en-US" sz="1500" dirty="0"/>
-          </a:p>
-          <a:p>
-            <a:pPr marL="342900" indent="-342900">
-              <a:spcAft>
-                <a:spcPts val="800"/>
-              </a:spcAft>
-              <a:buSzPct val="100000"/>
-              <a:buChar char="•"/>
-            </a:pPr>
-            <a:r>
-              <a:rPr lang="en-US" sz="1500" dirty="0">
-                <a:solidFill>
-                  <a:schemeClr val="tx1"/>
-                </a:solidFill>
-              </a:rPr>
-              <a:t>Fixed hand-tuned weights: the baseline to beat</a:t>
-            </a:r>
-            <a:endParaRPr lang="en-US" sz="1500" dirty="0"/>
+              <a:t>Global costmap uses live lidar only (no static SLAM layer). Inflation 0.15 → 0.35 m, a stronger obstacle critic, and the training simulator's clearance raised to 0.3 m (policy retrained). Failed goals: 1.4 → 0 (PPO), 2.4 → 0.4 (heuristic).</a:t>
+            </a:r>
+            <a:endParaRPr lang="en-US" sz="1400" dirty="0"/>
           </a:p>
         </p:txBody>
       </p:sp>
@@ -7893,26 +8688,50 @@
                 <a:ea typeface="Cambria" pitchFamily="34" charset="-122"/>
                 <a:cs typeface="Cambria" pitchFamily="34" charset="-120"/>
               </a:rPr>
-              <a:t>RL brain: the decision as a learning problem</a:t>
+              <a:t>Heuristic brain: frontier_coordinator</a:t>
             </a:r>
             <a:endParaRPr lang="en-US" sz="3200" dirty="0"/>
           </a:p>
         </p:txBody>
       </p:sp>
-      <p:sp>
-        <p:nvSpPr>
-          <p:cNvPr id="3" name="Shape 1"/>
+      <p:pic>
+        <p:nvPicPr>
+          <p:cNvPr id="3" name="Image 0" descr="07 coordinator replan">    </p:cNvPr>
+          <p:cNvPicPr>
+            <a:picLocks noChangeAspect="1"/>
+          </p:cNvPicPr>
+          <p:nvPr/>
+        </p:nvPicPr>
+        <p:blipFill>
+          <a:blip r:embed="rId1"/>
+          <a:stretch>
+            <a:fillRect/>
+          </a:stretch>
+        </p:blipFill>
+        <p:spPr>
+          <a:xfrm>
+            <a:off x="548640" y="1272228"/>
+            <a:ext cx="7315200" cy="3124824"/>
+          </a:xfrm>
+          <a:prstGeom prst="rect">
+            <a:avLst/>
+          </a:prstGeom>
+        </p:spPr>
+      </p:pic>
+      <p:sp>
+        <p:nvSpPr>
+          <p:cNvPr id="4" name="Shape 1"/>
           <p:cNvSpPr/>
           <p:nvPr/>
         </p:nvSpPr>
         <p:spPr>
           <a:xfrm>
-            <a:off x="548640" y="1371600"/>
-            <a:ext cx="3566160" cy="2377440"/>
+            <a:off x="731520" y="4754880"/>
+            <a:ext cx="6949440" cy="1280160"/>
           </a:xfrm>
           <a:prstGeom prst="roundRect">
             <a:avLst>
-              <a:gd name="adj" fmla="val 4615"/>
+              <a:gd name="adj" fmla="val 8571"/>
             </a:avLst>
           </a:prstGeom>
           <a:solidFill>
@@ -7928,39 +8747,14 @@
       </p:sp>
       <p:sp>
         <p:nvSpPr>
-          <p:cNvPr id="4" name="Shape 2"/>
-          <p:cNvSpPr/>
-          <p:nvPr/>
-        </p:nvSpPr>
-        <p:spPr>
-          <a:xfrm>
-            <a:off x="777240" y="1627632"/>
-            <a:ext cx="384048" cy="384048"/>
-          </a:xfrm>
-          <a:prstGeom prst="ellipse">
-            <a:avLst/>
-          </a:prstGeom>
-          <a:solidFill>
-            <a:srgbClr val="1F77B4"/>
-          </a:solidFill>
-          <a:ln w="12700">
-            <a:solidFill>
-              <a:srgbClr val="1F77B4"/>
-            </a:solidFill>
-            <a:prstDash val="solid"/>
-          </a:ln>
-        </p:spPr>
-      </p:sp>
-      <p:sp>
-        <p:nvSpPr>
-          <p:cNvPr id="5" name="Text 3"/>
+          <p:cNvPr id="5" name="Text 2"/>
           <p:cNvSpPr txBox="1"/>
           <p:nvPr/>
         </p:nvSpPr>
         <p:spPr>
           <a:xfrm>
-            <a:off x="1280160" y="1554480"/>
-            <a:ext cx="2651760" cy="548640"/>
+            <a:off x="914400" y="4846320"/>
+            <a:ext cx="6583680" cy="1097280"/>
           </a:xfrm>
           <a:prstGeom prst="rect">
             <a:avLst/>
@@ -7969,318 +8763,34 @@
           <a:ln/>
         </p:spPr>
         <p:txBody>
-          <a:bodyPr wrap="square" lIns="0" tIns="0" rIns="0" bIns="0" rtlCol="0" anchor="ctr"/>
+          <a:bodyPr wrap="square" rtlCol="0" anchor="ctr"/>
           <a:lstStyle/>
           <a:p>
             <a:pPr indent="0" marL="0">
               <a:buNone/>
             </a:pPr>
             <a:r>
-              <a:rPr lang="en-US" sz="1800" b="1" dirty="0">
+              <a:rPr lang="en-US" sz="1600" b="1" dirty="0">
                 <a:solidFill>
                   <a:schemeClr val="tx2"/>
                 </a:solidFill>
               </a:rPr>
-              <a:t>Action</a:t>
-            </a:r>
-            <a:endParaRPr lang="en-US" sz="1800" dirty="0"/>
-          </a:p>
-        </p:txBody>
-      </p:sp>
-      <p:sp>
-        <p:nvSpPr>
-          <p:cNvPr id="6" name="Text 4"/>
+              <a:t>cost = distance + 50 / d(other robot's goal) + 50 · max(0, metres into other robot's half)</a:t>
+            </a:r>
+            <a:endParaRPr lang="en-US" sz="1600" dirty="0"/>
+          </a:p>
+        </p:txBody>
+      </p:sp>
+      <p:sp>
+        <p:nvSpPr>
+          <p:cNvPr id="6" name="Text 3"/>
           <p:cNvSpPr txBox="1"/>
           <p:nvPr/>
         </p:nvSpPr>
         <p:spPr>
           <a:xfrm>
-            <a:off x="822960" y="2240280"/>
-            <a:ext cx="3063240" cy="1371600"/>
-          </a:xfrm>
-          <a:prstGeom prst="rect">
-            <a:avLst/>
-          </a:prstGeom>
-          <a:noFill/>
-          <a:ln/>
-        </p:spPr>
-        <p:txBody>
-          <a:bodyPr wrap="square" lIns="0" tIns="0" rIns="0" bIns="0" rtlCol="0" anchor="t"/>
-          <a:lstStyle/>
-          <a:p>
-            <a:pPr indent="0" marL="0">
-              <a:buNone/>
-            </a:pPr>
-            <a:r>
-              <a:rPr lang="en-US" sz="1400" dirty="0">
-                <a:solidFill>
-                  <a:schemeClr val="tx1"/>
-                </a:solidFill>
-              </a:rPr>
-              <a:t>Pick one of the 12 nearest reachable frontiers for the robot that needs a goal. Invalid slots are masked (MaskablePPO).</a:t>
-            </a:r>
-            <a:endParaRPr lang="en-US" sz="1400" dirty="0"/>
-          </a:p>
-        </p:txBody>
-      </p:sp>
-      <p:sp>
-        <p:nvSpPr>
-          <p:cNvPr id="7" name="Shape 5"/>
-          <p:cNvSpPr/>
-          <p:nvPr/>
-        </p:nvSpPr>
-        <p:spPr>
-          <a:xfrm>
-            <a:off x="4343400" y="1371600"/>
-            <a:ext cx="3566160" cy="2377440"/>
-          </a:xfrm>
-          <a:prstGeom prst="roundRect">
-            <a:avLst>
-              <a:gd name="adj" fmla="val 4615"/>
-            </a:avLst>
-          </a:prstGeom>
-          <a:solidFill>
-            <a:srgbClr val="EEF3F7"/>
-          </a:solidFill>
-          <a:ln w="12700">
-            <a:solidFill>
-              <a:srgbClr val="EEF3F7"/>
-            </a:solidFill>
-            <a:prstDash val="solid"/>
-          </a:ln>
-        </p:spPr>
-      </p:sp>
-      <p:sp>
-        <p:nvSpPr>
-          <p:cNvPr id="8" name="Shape 6"/>
-          <p:cNvSpPr/>
-          <p:nvPr/>
-        </p:nvSpPr>
-        <p:spPr>
-          <a:xfrm>
-            <a:off x="4572000" y="1627632"/>
-            <a:ext cx="384048" cy="384048"/>
-          </a:xfrm>
-          <a:prstGeom prst="ellipse">
-            <a:avLst/>
-          </a:prstGeom>
-          <a:solidFill>
-            <a:srgbClr val="0E7C86"/>
-          </a:solidFill>
-          <a:ln w="12700">
-            <a:solidFill>
-              <a:srgbClr val="0E7C86"/>
-            </a:solidFill>
-            <a:prstDash val="solid"/>
-          </a:ln>
-        </p:spPr>
-      </p:sp>
-      <p:sp>
-        <p:nvSpPr>
-          <p:cNvPr id="9" name="Text 7"/>
-          <p:cNvSpPr txBox="1"/>
-          <p:nvPr/>
-        </p:nvSpPr>
-        <p:spPr>
-          <a:xfrm>
-            <a:off x="5074920" y="1554480"/>
-            <a:ext cx="2651760" cy="548640"/>
-          </a:xfrm>
-          <a:prstGeom prst="rect">
-            <a:avLst/>
-          </a:prstGeom>
-          <a:noFill/>
-          <a:ln/>
-        </p:spPr>
-        <p:txBody>
-          <a:bodyPr wrap="square" lIns="0" tIns="0" rIns="0" bIns="0" rtlCol="0" anchor="ctr"/>
-          <a:lstStyle/>
-          <a:p>
-            <a:pPr indent="0" marL="0">
-              <a:buNone/>
-            </a:pPr>
-            <a:r>
-              <a:rPr lang="en-US" sz="1800" b="1" dirty="0">
-                <a:solidFill>
-                  <a:schemeClr val="tx2"/>
-                </a:solidFill>
-              </a:rPr>
-              <a:t>Observation</a:t>
-            </a:r>
-            <a:endParaRPr lang="en-US" sz="1800" dirty="0"/>
-          </a:p>
-        </p:txBody>
-      </p:sp>
-      <p:sp>
-        <p:nvSpPr>
-          <p:cNvPr id="10" name="Text 8"/>
-          <p:cNvSpPr txBox="1"/>
-          <p:nvPr/>
-        </p:nvSpPr>
-        <p:spPr>
-          <a:xfrm>
-            <a:off x="4617720" y="2240280"/>
-            <a:ext cx="3063240" cy="1371600"/>
-          </a:xfrm>
-          <a:prstGeom prst="rect">
-            <a:avLst/>
-          </a:prstGeom>
-          <a:noFill/>
-          <a:ln/>
-        </p:spPr>
-        <p:txBody>
-          <a:bodyPr wrap="square" lIns="0" tIns="0" rIns="0" bIns="0" rtlCol="0" anchor="t"/>
-          <a:lstStyle/>
-          <a:p>
-            <a:pPr indent="0" marL="0">
-              <a:buNone/>
-            </a:pPr>
-            <a:r>
-              <a:rPr lang="en-US" sz="1400" dirty="0">
-                <a:solidFill>
-                  <a:schemeClr val="tx1"/>
-                </a:solidFill>
-              </a:rPr>
-              <a:t>153 numbers: per candidate (position, distance, unknown area around it, distance to the other robot and its goal, heading, the heuristic's pick) plus global state.</a:t>
-            </a:r>
-            <a:endParaRPr lang="en-US" sz="1400" dirty="0"/>
-          </a:p>
-        </p:txBody>
-      </p:sp>
-      <p:sp>
-        <p:nvSpPr>
-          <p:cNvPr id="11" name="Shape 9"/>
-          <p:cNvSpPr/>
-          <p:nvPr/>
-        </p:nvSpPr>
-        <p:spPr>
-          <a:xfrm>
             <a:off x="8138160" y="1371600"/>
-            <a:ext cx="3566160" cy="2377440"/>
-          </a:xfrm>
-          <a:prstGeom prst="roundRect">
-            <a:avLst>
-              <a:gd name="adj" fmla="val 4615"/>
-            </a:avLst>
-          </a:prstGeom>
-          <a:solidFill>
-            <a:srgbClr val="EEF3F7"/>
-          </a:solidFill>
-          <a:ln w="12700">
-            <a:solidFill>
-              <a:srgbClr val="EEF3F7"/>
-            </a:solidFill>
-            <a:prstDash val="solid"/>
-          </a:ln>
-        </p:spPr>
-      </p:sp>
-      <p:sp>
-        <p:nvSpPr>
-          <p:cNvPr id="12" name="Shape 10"/>
-          <p:cNvSpPr/>
-          <p:nvPr/>
-        </p:nvSpPr>
-        <p:spPr>
-          <a:xfrm>
-            <a:off x="8366760" y="1627632"/>
-            <a:ext cx="384048" cy="384048"/>
-          </a:xfrm>
-          <a:prstGeom prst="ellipse">
-            <a:avLst/>
-          </a:prstGeom>
-          <a:solidFill>
-            <a:srgbClr val="F2A541"/>
-          </a:solidFill>
-          <a:ln w="12700">
-            <a:solidFill>
-              <a:srgbClr val="F2A541"/>
-            </a:solidFill>
-            <a:prstDash val="solid"/>
-          </a:ln>
-        </p:spPr>
-      </p:sp>
-      <p:sp>
-        <p:nvSpPr>
-          <p:cNvPr id="13" name="Text 11"/>
-          <p:cNvSpPr txBox="1"/>
-          <p:nvPr/>
-        </p:nvSpPr>
-        <p:spPr>
-          <a:xfrm>
-            <a:off x="8869680" y="1554480"/>
-            <a:ext cx="2651760" cy="548640"/>
-          </a:xfrm>
-          <a:prstGeom prst="rect">
-            <a:avLst/>
-          </a:prstGeom>
-          <a:noFill/>
-          <a:ln/>
-        </p:spPr>
-        <p:txBody>
-          <a:bodyPr wrap="square" lIns="0" tIns="0" rIns="0" bIns="0" rtlCol="0" anchor="ctr"/>
-          <a:lstStyle/>
-          <a:p>
-            <a:pPr indent="0" marL="0">
-              <a:buNone/>
-            </a:pPr>
-            <a:r>
-              <a:rPr lang="en-US" sz="1800" b="1" dirty="0">
-                <a:solidFill>
-                  <a:schemeClr val="tx2"/>
-                </a:solidFill>
-              </a:rPr>
-              <a:t>Reward</a:t>
-            </a:r>
-            <a:endParaRPr lang="en-US" sz="1800" dirty="0"/>
-          </a:p>
-        </p:txBody>
-      </p:sp>
-      <p:sp>
-        <p:nvSpPr>
-          <p:cNvPr id="14" name="Text 12"/>
-          <p:cNvSpPr txBox="1"/>
-          <p:nvPr/>
-        </p:nvSpPr>
-        <p:spPr>
-          <a:xfrm>
-            <a:off x="8412480" y="2240280"/>
-            <a:ext cx="3063240" cy="1371600"/>
-          </a:xfrm>
-          <a:prstGeom prst="rect">
-            <a:avLst/>
-          </a:prstGeom>
-          <a:noFill/>
-          <a:ln/>
-        </p:spPr>
-        <p:txBody>
-          <a:bodyPr wrap="square" lIns="0" tIns="0" rIns="0" bIns="0" rtlCol="0" anchor="t"/>
-          <a:lstStyle/>
-          <a:p>
-            <a:pPr indent="0" marL="0">
-              <a:buNone/>
-            </a:pPr>
-            <a:r>
-              <a:rPr lang="en-US" sz="1400" dirty="0">
-                <a:solidFill>
-                  <a:schemeClr val="tx1"/>
-                </a:solidFill>
-              </a:rPr>
-              <a:t>+0.1 per newly mapped m², −0.01 per simulated second. Finishing sooner scores higher.</a:t>
-            </a:r>
-            <a:endParaRPr lang="en-US" sz="1400" dirty="0"/>
-          </a:p>
-        </p:txBody>
-      </p:sp>
-      <p:sp>
-        <p:nvSpPr>
-          <p:cNvPr id="15" name="Text 13"/>
-          <p:cNvSpPr txBox="1"/>
-          <p:nvPr/>
-        </p:nvSpPr>
-        <p:spPr>
-          <a:xfrm>
-            <a:off x="548640" y="4114800"/>
-            <a:ext cx="11064240" cy="2377440"/>
+            <a:ext cx="3657600" cy="4846320"/>
           </a:xfrm>
           <a:prstGeom prst="rect">
             <a:avLst/>
@@ -8300,14 +8810,14 @@
               <a:buChar char="•"/>
             </a:pPr>
             <a:r>
-              <a:rPr lang="en-US" sz="1600" dirty="0">
+              <a:rPr lang="en-US" sz="1500" dirty="0">
                 <a:solidFill>
                   <a:schemeClr val="tx1"/>
                 </a:solidFill>
               </a:rPr>
-              <a:t>One step = one whole trip, so episodes are ~10 decisions, not hundreds of motor commands</a:t>
-            </a:r>
-            <a:endParaRPr lang="en-US" sz="1600" dirty="0"/>
+              <a:t>Frontiers: morphological detection on /map, clusters &gt; 15 px, merged within 1.5 m</a:t>
+            </a:r>
+            <a:endParaRPr lang="en-US" sz="1500" dirty="0"/>
           </a:p>
           <a:p>
             <a:pPr marL="342900" indent="-342900">
@@ -8318,14 +8828,14 @@
               <a:buChar char="•"/>
             </a:pPr>
             <a:r>
-              <a:rPr lang="en-US" sz="1600" dirty="0">
+              <a:rPr lang="en-US" sz="1500" dirty="0">
                 <a:solidFill>
                   <a:schemeClr val="tx1"/>
                 </a:solidFill>
               </a:rPr>
-              <a:t>A compact, ego-centric feature vector instead of a raw map image</a:t>
-            </a:r>
-            <a:endParaRPr lang="en-US" sz="1600" dirty="0"/>
+              <a:t>Replans every 3 s; stuck detection after ~9 s without progress</a:t>
+            </a:r>
+            <a:endParaRPr lang="en-US" sz="1500" dirty="0"/>
           </a:p>
           <a:p>
             <a:pPr marL="342900" indent="-342900">
@@ -8336,14 +8846,14 @@
               <a:buChar char="•"/>
             </a:pPr>
             <a:r>
-              <a:rPr lang="en-US" sz="1600" dirty="0">
+              <a:rPr lang="en-US" sz="1500" dirty="0">
                 <a:solidFill>
                   <a:schemeClr val="tx1"/>
                 </a:solidFill>
               </a:rPr>
-              <a:t>A deterministic 2D simulator: a clean learning signal, ~0.1 s per episode</a:t>
-            </a:r>
-            <a:endParaRPr lang="en-US" sz="1600" dirty="0"/>
+              <a:t>Failed goals blacklisted for 30 s</a:t>
+            </a:r>
+            <a:endParaRPr lang="en-US" sz="1500" dirty="0"/>
           </a:p>
           <a:p>
             <a:pPr marL="342900" indent="-342900">
@@ -8354,14 +8864,14 @@
               <a:buChar char="•"/>
             </a:pPr>
             <a:r>
-              <a:rPr lang="en-US" sz="1600" dirty="0">
+              <a:rPr lang="en-US" sz="1500" dirty="0">
                 <a:solidFill>
                   <a:schemeClr val="tx1"/>
                 </a:solidFill>
               </a:rPr>
-              <a:t>Policy: 2×128 MLP actor and critic; PPO with 8 parallel environments</a:t>
-            </a:r>
-            <a:endParaRPr lang="en-US" sz="1600" dirty="0"/>
+              <a:t>Fixed hand-tuned weights: the baseline to beat</a:t>
+            </a:r>
+            <a:endParaRPr lang="en-US" sz="1500" dirty="0"/>
           </a:p>
         </p:txBody>
       </p:sp>
@@ -8470,36 +8980,478 @@
                 <a:ea typeface="Cambria" pitchFamily="34" charset="-122"/>
                 <a:cs typeface="Cambria" pitchFamily="34" charset="-120"/>
               </a:rPr>
-              <a:t>RL pipeline: train in 2D, deploy zero-shot to Gazebo</a:t>
+              <a:t>RL brain: the decision as a learning problem</a:t>
             </a:r>
             <a:endParaRPr lang="en-US" sz="3200" dirty="0"/>
           </a:p>
         </p:txBody>
       </p:sp>
-      <p:pic>
-        <p:nvPicPr>
-          <p:cNvPr id="3" name="Image 0" descr="04 rl pipeline">    </p:cNvPr>
-          <p:cNvPicPr>
-            <a:picLocks noChangeAspect="1"/>
-          </p:cNvPicPr>
+      <p:sp>
+        <p:nvSpPr>
+          <p:cNvPr id="3" name="Shape 1"/>
+          <p:cNvSpPr/>
           <p:nvPr/>
-        </p:nvPicPr>
-        <p:blipFill>
-          <a:blip r:embed="rId1"/>
-          <a:stretch>
-            <a:fillRect/>
-          </a:stretch>
-        </p:blipFill>
-        <p:spPr>
-          <a:xfrm>
-            <a:off x="548640" y="1272552"/>
-            <a:ext cx="11064240" cy="5227295"/>
-          </a:xfrm>
-          <a:prstGeom prst="rect">
-            <a:avLst/>
-          </a:prstGeom>
-        </p:spPr>
-      </p:pic>
+        </p:nvSpPr>
+        <p:spPr>
+          <a:xfrm>
+            <a:off x="548640" y="1371600"/>
+            <a:ext cx="3566160" cy="2377440"/>
+          </a:xfrm>
+          <a:prstGeom prst="roundRect">
+            <a:avLst>
+              <a:gd name="adj" fmla="val 4615"/>
+            </a:avLst>
+          </a:prstGeom>
+          <a:solidFill>
+            <a:srgbClr val="EEF3F7"/>
+          </a:solidFill>
+          <a:ln w="12700">
+            <a:solidFill>
+              <a:srgbClr val="EEF3F7"/>
+            </a:solidFill>
+            <a:prstDash val="solid"/>
+          </a:ln>
+        </p:spPr>
+      </p:sp>
+      <p:sp>
+        <p:nvSpPr>
+          <p:cNvPr id="4" name="Shape 2"/>
+          <p:cNvSpPr/>
+          <p:nvPr/>
+        </p:nvSpPr>
+        <p:spPr>
+          <a:xfrm>
+            <a:off x="777240" y="1627632"/>
+            <a:ext cx="384048" cy="384048"/>
+          </a:xfrm>
+          <a:prstGeom prst="ellipse">
+            <a:avLst/>
+          </a:prstGeom>
+          <a:solidFill>
+            <a:srgbClr val="1F77B4"/>
+          </a:solidFill>
+          <a:ln w="12700">
+            <a:solidFill>
+              <a:srgbClr val="1F77B4"/>
+            </a:solidFill>
+            <a:prstDash val="solid"/>
+          </a:ln>
+        </p:spPr>
+      </p:sp>
+      <p:sp>
+        <p:nvSpPr>
+          <p:cNvPr id="5" name="Text 3"/>
+          <p:cNvSpPr txBox="1"/>
+          <p:nvPr/>
+        </p:nvSpPr>
+        <p:spPr>
+          <a:xfrm>
+            <a:off x="1280160" y="1554480"/>
+            <a:ext cx="2651760" cy="548640"/>
+          </a:xfrm>
+          <a:prstGeom prst="rect">
+            <a:avLst/>
+          </a:prstGeom>
+          <a:noFill/>
+          <a:ln/>
+        </p:spPr>
+        <p:txBody>
+          <a:bodyPr wrap="square" lIns="0" tIns="0" rIns="0" bIns="0" rtlCol="0" anchor="ctr"/>
+          <a:lstStyle/>
+          <a:p>
+            <a:pPr indent="0" marL="0">
+              <a:buNone/>
+            </a:pPr>
+            <a:r>
+              <a:rPr lang="en-US" sz="1800" b="1" dirty="0">
+                <a:solidFill>
+                  <a:schemeClr val="tx2"/>
+                </a:solidFill>
+              </a:rPr>
+              <a:t>Action</a:t>
+            </a:r>
+            <a:endParaRPr lang="en-US" sz="1800" dirty="0"/>
+          </a:p>
+        </p:txBody>
+      </p:sp>
+      <p:sp>
+        <p:nvSpPr>
+          <p:cNvPr id="6" name="Text 4"/>
+          <p:cNvSpPr txBox="1"/>
+          <p:nvPr/>
+        </p:nvSpPr>
+        <p:spPr>
+          <a:xfrm>
+            <a:off x="822960" y="2240280"/>
+            <a:ext cx="3063240" cy="1371600"/>
+          </a:xfrm>
+          <a:prstGeom prst="rect">
+            <a:avLst/>
+          </a:prstGeom>
+          <a:noFill/>
+          <a:ln/>
+        </p:spPr>
+        <p:txBody>
+          <a:bodyPr wrap="square" lIns="0" tIns="0" rIns="0" bIns="0" rtlCol="0" anchor="t"/>
+          <a:lstStyle/>
+          <a:p>
+            <a:pPr indent="0" marL="0">
+              <a:buNone/>
+            </a:pPr>
+            <a:r>
+              <a:rPr lang="en-US" sz="1400" dirty="0">
+                <a:solidFill>
+                  <a:schemeClr val="tx1"/>
+                </a:solidFill>
+              </a:rPr>
+              <a:t>Pick one of the 12 nearest reachable frontiers for the robot that needs a goal. Invalid slots are masked (MaskablePPO).</a:t>
+            </a:r>
+            <a:endParaRPr lang="en-US" sz="1400" dirty="0"/>
+          </a:p>
+        </p:txBody>
+      </p:sp>
+      <p:sp>
+        <p:nvSpPr>
+          <p:cNvPr id="7" name="Shape 5"/>
+          <p:cNvSpPr/>
+          <p:nvPr/>
+        </p:nvSpPr>
+        <p:spPr>
+          <a:xfrm>
+            <a:off x="4343400" y="1371600"/>
+            <a:ext cx="3566160" cy="2377440"/>
+          </a:xfrm>
+          <a:prstGeom prst="roundRect">
+            <a:avLst>
+              <a:gd name="adj" fmla="val 4615"/>
+            </a:avLst>
+          </a:prstGeom>
+          <a:solidFill>
+            <a:srgbClr val="EEF3F7"/>
+          </a:solidFill>
+          <a:ln w="12700">
+            <a:solidFill>
+              <a:srgbClr val="EEF3F7"/>
+            </a:solidFill>
+            <a:prstDash val="solid"/>
+          </a:ln>
+        </p:spPr>
+      </p:sp>
+      <p:sp>
+        <p:nvSpPr>
+          <p:cNvPr id="8" name="Shape 6"/>
+          <p:cNvSpPr/>
+          <p:nvPr/>
+        </p:nvSpPr>
+        <p:spPr>
+          <a:xfrm>
+            <a:off x="4572000" y="1627632"/>
+            <a:ext cx="384048" cy="384048"/>
+          </a:xfrm>
+          <a:prstGeom prst="ellipse">
+            <a:avLst/>
+          </a:prstGeom>
+          <a:solidFill>
+            <a:srgbClr val="0E7C86"/>
+          </a:solidFill>
+          <a:ln w="12700">
+            <a:solidFill>
+              <a:srgbClr val="0E7C86"/>
+            </a:solidFill>
+            <a:prstDash val="solid"/>
+          </a:ln>
+        </p:spPr>
+      </p:sp>
+      <p:sp>
+        <p:nvSpPr>
+          <p:cNvPr id="9" name="Text 7"/>
+          <p:cNvSpPr txBox="1"/>
+          <p:nvPr/>
+        </p:nvSpPr>
+        <p:spPr>
+          <a:xfrm>
+            <a:off x="5074920" y="1554480"/>
+            <a:ext cx="2651760" cy="548640"/>
+          </a:xfrm>
+          <a:prstGeom prst="rect">
+            <a:avLst/>
+          </a:prstGeom>
+          <a:noFill/>
+          <a:ln/>
+        </p:spPr>
+        <p:txBody>
+          <a:bodyPr wrap="square" lIns="0" tIns="0" rIns="0" bIns="0" rtlCol="0" anchor="ctr"/>
+          <a:lstStyle/>
+          <a:p>
+            <a:pPr indent="0" marL="0">
+              <a:buNone/>
+            </a:pPr>
+            <a:r>
+              <a:rPr lang="en-US" sz="1800" b="1" dirty="0">
+                <a:solidFill>
+                  <a:schemeClr val="tx2"/>
+                </a:solidFill>
+              </a:rPr>
+              <a:t>Observation</a:t>
+            </a:r>
+            <a:endParaRPr lang="en-US" sz="1800" dirty="0"/>
+          </a:p>
+        </p:txBody>
+      </p:sp>
+      <p:sp>
+        <p:nvSpPr>
+          <p:cNvPr id="10" name="Text 8"/>
+          <p:cNvSpPr txBox="1"/>
+          <p:nvPr/>
+        </p:nvSpPr>
+        <p:spPr>
+          <a:xfrm>
+            <a:off x="4617720" y="2240280"/>
+            <a:ext cx="3063240" cy="1371600"/>
+          </a:xfrm>
+          <a:prstGeom prst="rect">
+            <a:avLst/>
+          </a:prstGeom>
+          <a:noFill/>
+          <a:ln/>
+        </p:spPr>
+        <p:txBody>
+          <a:bodyPr wrap="square" lIns="0" tIns="0" rIns="0" bIns="0" rtlCol="0" anchor="t"/>
+          <a:lstStyle/>
+          <a:p>
+            <a:pPr indent="0" marL="0">
+              <a:buNone/>
+            </a:pPr>
+            <a:r>
+              <a:rPr lang="en-US" sz="1400" dirty="0">
+                <a:solidFill>
+                  <a:schemeClr val="tx1"/>
+                </a:solidFill>
+              </a:rPr>
+              <a:t>153 numbers: per candidate (position, distance, unknown area around it, distance to the other robot and its goal, heading, the heuristic's pick) plus global state.</a:t>
+            </a:r>
+            <a:endParaRPr lang="en-US" sz="1400" dirty="0"/>
+          </a:p>
+        </p:txBody>
+      </p:sp>
+      <p:sp>
+        <p:nvSpPr>
+          <p:cNvPr id="11" name="Shape 9"/>
+          <p:cNvSpPr/>
+          <p:nvPr/>
+        </p:nvSpPr>
+        <p:spPr>
+          <a:xfrm>
+            <a:off x="8138160" y="1371600"/>
+            <a:ext cx="3566160" cy="2377440"/>
+          </a:xfrm>
+          <a:prstGeom prst="roundRect">
+            <a:avLst>
+              <a:gd name="adj" fmla="val 4615"/>
+            </a:avLst>
+          </a:prstGeom>
+          <a:solidFill>
+            <a:srgbClr val="EEF3F7"/>
+          </a:solidFill>
+          <a:ln w="12700">
+            <a:solidFill>
+              <a:srgbClr val="EEF3F7"/>
+            </a:solidFill>
+            <a:prstDash val="solid"/>
+          </a:ln>
+        </p:spPr>
+      </p:sp>
+      <p:sp>
+        <p:nvSpPr>
+          <p:cNvPr id="12" name="Shape 10"/>
+          <p:cNvSpPr/>
+          <p:nvPr/>
+        </p:nvSpPr>
+        <p:spPr>
+          <a:xfrm>
+            <a:off x="8366760" y="1627632"/>
+            <a:ext cx="384048" cy="384048"/>
+          </a:xfrm>
+          <a:prstGeom prst="ellipse">
+            <a:avLst/>
+          </a:prstGeom>
+          <a:solidFill>
+            <a:srgbClr val="F2A541"/>
+          </a:solidFill>
+          <a:ln w="12700">
+            <a:solidFill>
+              <a:srgbClr val="F2A541"/>
+            </a:solidFill>
+            <a:prstDash val="solid"/>
+          </a:ln>
+        </p:spPr>
+      </p:sp>
+      <p:sp>
+        <p:nvSpPr>
+          <p:cNvPr id="13" name="Text 11"/>
+          <p:cNvSpPr txBox="1"/>
+          <p:nvPr/>
+        </p:nvSpPr>
+        <p:spPr>
+          <a:xfrm>
+            <a:off x="8869680" y="1554480"/>
+            <a:ext cx="2651760" cy="548640"/>
+          </a:xfrm>
+          <a:prstGeom prst="rect">
+            <a:avLst/>
+          </a:prstGeom>
+          <a:noFill/>
+          <a:ln/>
+        </p:spPr>
+        <p:txBody>
+          <a:bodyPr wrap="square" lIns="0" tIns="0" rIns="0" bIns="0" rtlCol="0" anchor="ctr"/>
+          <a:lstStyle/>
+          <a:p>
+            <a:pPr indent="0" marL="0">
+              <a:buNone/>
+            </a:pPr>
+            <a:r>
+              <a:rPr lang="en-US" sz="1800" b="1" dirty="0">
+                <a:solidFill>
+                  <a:schemeClr val="tx2"/>
+                </a:solidFill>
+              </a:rPr>
+              <a:t>Reward</a:t>
+            </a:r>
+            <a:endParaRPr lang="en-US" sz="1800" dirty="0"/>
+          </a:p>
+        </p:txBody>
+      </p:sp>
+      <p:sp>
+        <p:nvSpPr>
+          <p:cNvPr id="14" name="Text 12"/>
+          <p:cNvSpPr txBox="1"/>
+          <p:nvPr/>
+        </p:nvSpPr>
+        <p:spPr>
+          <a:xfrm>
+            <a:off x="8412480" y="2240280"/>
+            <a:ext cx="3063240" cy="1371600"/>
+          </a:xfrm>
+          <a:prstGeom prst="rect">
+            <a:avLst/>
+          </a:prstGeom>
+          <a:noFill/>
+          <a:ln/>
+        </p:spPr>
+        <p:txBody>
+          <a:bodyPr wrap="square" lIns="0" tIns="0" rIns="0" bIns="0" rtlCol="0" anchor="t"/>
+          <a:lstStyle/>
+          <a:p>
+            <a:pPr indent="0" marL="0">
+              <a:buNone/>
+            </a:pPr>
+            <a:r>
+              <a:rPr lang="en-US" sz="1400" dirty="0">
+                <a:solidFill>
+                  <a:schemeClr val="tx1"/>
+                </a:solidFill>
+              </a:rPr>
+              <a:t>+0.1 per newly mapped m², −0.01 per simulated second. Finishing sooner scores higher.</a:t>
+            </a:r>
+            <a:endParaRPr lang="en-US" sz="1400" dirty="0"/>
+          </a:p>
+        </p:txBody>
+      </p:sp>
+      <p:sp>
+        <p:nvSpPr>
+          <p:cNvPr id="15" name="Text 13"/>
+          <p:cNvSpPr txBox="1"/>
+          <p:nvPr/>
+        </p:nvSpPr>
+        <p:spPr>
+          <a:xfrm>
+            <a:off x="548640" y="4114800"/>
+            <a:ext cx="11064240" cy="2377440"/>
+          </a:xfrm>
+          <a:prstGeom prst="rect">
+            <a:avLst/>
+          </a:prstGeom>
+          <a:noFill/>
+          <a:ln/>
+        </p:spPr>
+        <p:txBody>
+          <a:bodyPr wrap="square" rtlCol="0" anchor="t"/>
+          <a:lstStyle/>
+          <a:p>
+            <a:pPr marL="342900" indent="-342900">
+              <a:spcAft>
+                <a:spcPts val="800"/>
+              </a:spcAft>
+              <a:buSzPct val="100000"/>
+              <a:buChar char="•"/>
+            </a:pPr>
+            <a:r>
+              <a:rPr lang="en-US" sz="1600" dirty="0">
+                <a:solidFill>
+                  <a:schemeClr val="tx1"/>
+                </a:solidFill>
+              </a:rPr>
+              <a:t>One step = one whole trip, so episodes are ~10 decisions, not hundreds of motor commands</a:t>
+            </a:r>
+            <a:endParaRPr lang="en-US" sz="1600" dirty="0"/>
+          </a:p>
+          <a:p>
+            <a:pPr marL="342900" indent="-342900">
+              <a:spcAft>
+                <a:spcPts val="800"/>
+              </a:spcAft>
+              <a:buSzPct val="100000"/>
+              <a:buChar char="•"/>
+            </a:pPr>
+            <a:r>
+              <a:rPr lang="en-US" sz="1600" dirty="0">
+                <a:solidFill>
+                  <a:schemeClr val="tx1"/>
+                </a:solidFill>
+              </a:rPr>
+              <a:t>A compact, ego-centric feature vector instead of a raw map image</a:t>
+            </a:r>
+            <a:endParaRPr lang="en-US" sz="1600" dirty="0"/>
+          </a:p>
+          <a:p>
+            <a:pPr marL="342900" indent="-342900">
+              <a:spcAft>
+                <a:spcPts val="800"/>
+              </a:spcAft>
+              <a:buSzPct val="100000"/>
+              <a:buChar char="•"/>
+            </a:pPr>
+            <a:r>
+              <a:rPr lang="en-US" sz="1600" dirty="0">
+                <a:solidFill>
+                  <a:schemeClr val="tx1"/>
+                </a:solidFill>
+              </a:rPr>
+              <a:t>A deterministic 2D simulator: a clean learning signal, ~0.1 s per episode</a:t>
+            </a:r>
+            <a:endParaRPr lang="en-US" sz="1600" dirty="0"/>
+          </a:p>
+          <a:p>
+            <a:pPr marL="342900" indent="-342900">
+              <a:spcAft>
+                <a:spcPts val="800"/>
+              </a:spcAft>
+              <a:buSzPct val="100000"/>
+              <a:buChar char="•"/>
+            </a:pPr>
+            <a:r>
+              <a:rPr lang="en-US" sz="1600" dirty="0">
+                <a:solidFill>
+                  <a:schemeClr val="tx1"/>
+                </a:solidFill>
+              </a:rPr>
+              <a:t>Policy: 2×128 MLP actor and critic; PPO with 8 parallel environments</a:t>
+            </a:r>
+            <a:endParaRPr lang="en-US" sz="1600" dirty="0"/>
+          </a:p>
+        </p:txBody>
+      </p:sp>
       <p:sp>
         <p:nvSpPr>
           <p:cNvPr id="25" name="Slide Number Placeholder 0"/>
@@ -8605,7 +9557,7 @@
                 <a:ea typeface="Cambria" pitchFamily="34" charset="-122"/>
                 <a:cs typeface="Cambria" pitchFamily="34" charset="-120"/>
               </a:rPr>
-              <a:t>The 2D training simulator (rl_sim)</a:t>
+              <a:t>RL pipeline: train in 2D, deploy zero-shot to Gazebo</a:t>
             </a:r>
             <a:endParaRPr lang="en-US" sz="3200" dirty="0"/>
           </a:p>
@@ -8613,7 +9565,7 @@
       </p:sp>
       <p:pic>
         <p:nvPicPr>
-          <p:cNvPr id="3" name="Image 0" descr="06 env step">    </p:cNvPr>
+          <p:cNvPr id="3" name="Image 0" descr="04 rl pipeline">    </p:cNvPr>
           <p:cNvPicPr>
             <a:picLocks noChangeAspect="1"/>
           </p:cNvPicPr>
@@ -8627,144 +9579,14 @@
         </p:blipFill>
         <p:spPr>
           <a:xfrm>
-            <a:off x="548640" y="1201516"/>
-            <a:ext cx="7315200" cy="3723449"/>
+            <a:off x="548640" y="1272552"/>
+            <a:ext cx="11064240" cy="5227295"/>
           </a:xfrm>
           <a:prstGeom prst="rect">
             <a:avLst/>
           </a:prstGeom>
         </p:spPr>
       </p:pic>
-      <p:sp>
-        <p:nvSpPr>
-          <p:cNvPr id="4" name="Text 1"/>
-          <p:cNvSpPr txBox="1"/>
-          <p:nvPr/>
-        </p:nvSpPr>
-        <p:spPr>
-          <a:xfrm>
-            <a:off x="8138160" y="1371600"/>
-            <a:ext cx="3657600" cy="4846320"/>
-          </a:xfrm>
-          <a:prstGeom prst="rect">
-            <a:avLst/>
-          </a:prstGeom>
-          <a:noFill/>
-          <a:ln/>
-        </p:spPr>
-        <p:txBody>
-          <a:bodyPr wrap="square" rtlCol="0" anchor="t"/>
-          <a:lstStyle/>
-          <a:p>
-            <a:pPr marL="342900" indent="-342900">
-              <a:spcAft>
-                <a:spcPts val="800"/>
-              </a:spcAft>
-              <a:buSzPct val="100000"/>
-              <a:buChar char="•"/>
-            </a:pPr>
-            <a:r>
-              <a:rPr lang="en-US" sz="1500" dirty="0">
-                <a:solidFill>
-                  <a:schemeClr val="tx1"/>
-                </a:solidFill>
-              </a:rPr>
-              <a:t>Arena parsed from the same world file Gazebo loads, at 0.05 m resolution</a:t>
-            </a:r>
-            <a:endParaRPr lang="en-US" sz="1500" dirty="0"/>
-          </a:p>
-          <a:p>
-            <a:pPr marL="342900" indent="-342900">
-              <a:spcAft>
-                <a:spcPts val="800"/>
-              </a:spcAft>
-              <a:buSzPct val="100000"/>
-              <a:buChar char="•"/>
-            </a:pPr>
-            <a:r>
-              <a:rPr lang="en-US" sz="1500" dirty="0">
-                <a:solidFill>
-                  <a:schemeClr val="tx1"/>
-                </a:solidFill>
-              </a:rPr>
-              <a:t>360-ray lidar, 3.5 m range (TurtleBot3 LDS-01)</a:t>
-            </a:r>
-            <a:endParaRPr lang="en-US" sz="1500" dirty="0"/>
-          </a:p>
-          <a:p>
-            <a:pPr marL="342900" indent="-342900">
-              <a:spcAft>
-                <a:spcPts val="800"/>
-              </a:spcAft>
-              <a:buSzPct val="100000"/>
-              <a:buChar char="•"/>
-            </a:pPr>
-            <a:r>
-              <a:rPr lang="en-US" sz="1500" dirty="0">
-                <a:solidFill>
-                  <a:schemeClr val="tx1"/>
-                </a:solidFill>
-              </a:rPr>
-              <a:t>A* on a 0.2 m-inflated map at 0.15 m/s (stand-in for Nav2)</a:t>
-            </a:r>
-            <a:endParaRPr lang="en-US" sz="1500" dirty="0"/>
-          </a:p>
-          <a:p>
-            <a:pPr marL="342900" indent="-342900">
-              <a:spcAft>
-                <a:spcPts val="800"/>
-              </a:spcAft>
-              <a:buSzPct val="100000"/>
-              <a:buChar char="•"/>
-            </a:pPr>
-            <a:r>
-              <a:rPr lang="en-US" sz="1500" dirty="0">
-                <a:solidFill>
-                  <a:schemeClr val="tx1"/>
-                </a:solidFill>
-              </a:rPr>
-              <a:t>Frontier detection identical to the coordinator</a:t>
-            </a:r>
-            <a:endParaRPr lang="en-US" sz="1500" dirty="0"/>
-          </a:p>
-        </p:txBody>
-      </p:sp>
-      <p:sp>
-        <p:nvSpPr>
-          <p:cNvPr id="5" name="Text 2"/>
-          <p:cNvSpPr txBox="1"/>
-          <p:nvPr/>
-        </p:nvSpPr>
-        <p:spPr>
-          <a:xfrm>
-            <a:off x="731520" y="5212080"/>
-            <a:ext cx="6949440" cy="822960"/>
-          </a:xfrm>
-          <a:prstGeom prst="rect">
-            <a:avLst/>
-          </a:prstGeom>
-          <a:noFill/>
-          <a:ln/>
-        </p:spPr>
-        <p:txBody>
-          <a:bodyPr wrap="square" rtlCol="0" anchor="ctr"/>
-          <a:lstStyle/>
-          <a:p>
-            <a:pPr indent="0" marL="0">
-              <a:buNone/>
-            </a:pPr>
-            <a:r>
-              <a:rPr lang="en-US" sz="1600" i="1" dirty="0">
-                <a:solidFill>
-                  <a:schemeClr val="accent1"/>
-                </a:solidFill>
-              </a:rPr>
-              <a:t>~0.1 s per episode in 2D vs ~5 min per episode in Gazebo: the reason training happens here</a:t>
-            </a:r>
-            <a:endParaRPr lang="en-US" sz="1600" dirty="0"/>
-          </a:p>
-        </p:txBody>
-      </p:sp>
       <p:sp>
         <p:nvSpPr>
           <p:cNvPr id="25" name="Slide Number Placeholder 0"/>
